--- a/HIC 구상 PPT.pptx
+++ b/HIC 구상 PPT.pptx
@@ -5,13 +5,15 @@
     <p:sldMasterId id="2147483648" r:id="rId1"/>
   </p:sldMasterIdLst>
   <p:notesMasterIdLst>
-    <p:notesMasterId r:id="rId6"/>
+    <p:notesMasterId r:id="rId8"/>
   </p:notesMasterIdLst>
   <p:sldIdLst>
     <p:sldId id="256" r:id="rId2"/>
     <p:sldId id="257" r:id="rId3"/>
-    <p:sldId id="258" r:id="rId4"/>
-    <p:sldId id="259" r:id="rId5"/>
+    <p:sldId id="261" r:id="rId4"/>
+    <p:sldId id="260" r:id="rId5"/>
+    <p:sldId id="258" r:id="rId6"/>
+    <p:sldId id="259" r:id="rId7"/>
   </p:sldIdLst>
   <p:sldSz cx="12192000" cy="6858000"/>
   <p:notesSz cx="6858000" cy="9144000"/>
@@ -110,6 +112,14 @@
       </a:defRPr>
     </a:lvl9pPr>
   </p:defaultTextStyle>
+  <p:extLst>
+    <p:ext uri="{EFAFB233-063F-42B5-8137-9DF3F51BA10A}">
+      <p15:sldGuideLst xmlns:p15="http://schemas.microsoft.com/office/powerpoint/2012/main"/>
+    </p:ext>
+    <p:ext uri="{2D200454-40CA-4A62-9FC3-DE9A4176ACB9}">
+      <p15:notesGuideLst xmlns:p15="http://schemas.microsoft.com/office/powerpoint/2012/main"/>
+    </p:ext>
+  </p:extLst>
 </p:presentation>
 </file>
 
@@ -195,7 +205,7 @@
           <a:p>
             <a:fld id="{A20D0AE5-1444-44C5-A6BD-D9D7C7DE6C77}" type="datetimeFigureOut">
               <a:rPr lang="ko-KR" altLang="en-US" smtClean="0"/>
-              <a:t>2020-02-21</a:t>
+              <a:t>2020-02-24</a:t>
             </a:fld>
             <a:endParaRPr lang="ko-KR" altLang="en-US"/>
           </a:p>
@@ -609,7 +619,7 @@
           <a:p>
             <a:fld id="{5659B43B-D3FA-48E7-92ED-9924A76F9674}" type="datetimeFigureOut">
               <a:rPr lang="ko-KR" altLang="en-US" smtClean="0"/>
-              <a:t>2020-02-21</a:t>
+              <a:t>2020-02-24</a:t>
             </a:fld>
             <a:endParaRPr lang="ko-KR" altLang="en-US"/>
           </a:p>
@@ -807,7 +817,7 @@
           <a:p>
             <a:fld id="{5659B43B-D3FA-48E7-92ED-9924A76F9674}" type="datetimeFigureOut">
               <a:rPr lang="ko-KR" altLang="en-US" smtClean="0"/>
-              <a:t>2020-02-21</a:t>
+              <a:t>2020-02-24</a:t>
             </a:fld>
             <a:endParaRPr lang="ko-KR" altLang="en-US"/>
           </a:p>
@@ -1015,7 +1025,7 @@
           <a:p>
             <a:fld id="{5659B43B-D3FA-48E7-92ED-9924A76F9674}" type="datetimeFigureOut">
               <a:rPr lang="ko-KR" altLang="en-US" smtClean="0"/>
-              <a:t>2020-02-21</a:t>
+              <a:t>2020-02-24</a:t>
             </a:fld>
             <a:endParaRPr lang="ko-KR" altLang="en-US"/>
           </a:p>
@@ -1213,7 +1223,7 @@
           <a:p>
             <a:fld id="{5659B43B-D3FA-48E7-92ED-9924A76F9674}" type="datetimeFigureOut">
               <a:rPr lang="ko-KR" altLang="en-US" smtClean="0"/>
-              <a:t>2020-02-21</a:t>
+              <a:t>2020-02-24</a:t>
             </a:fld>
             <a:endParaRPr lang="ko-KR" altLang="en-US"/>
           </a:p>
@@ -1488,7 +1498,7 @@
           <a:p>
             <a:fld id="{5659B43B-D3FA-48E7-92ED-9924A76F9674}" type="datetimeFigureOut">
               <a:rPr lang="ko-KR" altLang="en-US" smtClean="0"/>
-              <a:t>2020-02-21</a:t>
+              <a:t>2020-02-24</a:t>
             </a:fld>
             <a:endParaRPr lang="ko-KR" altLang="en-US"/>
           </a:p>
@@ -1753,7 +1763,7 @@
           <a:p>
             <a:fld id="{5659B43B-D3FA-48E7-92ED-9924A76F9674}" type="datetimeFigureOut">
               <a:rPr lang="ko-KR" altLang="en-US" smtClean="0"/>
-              <a:t>2020-02-21</a:t>
+              <a:t>2020-02-24</a:t>
             </a:fld>
             <a:endParaRPr lang="ko-KR" altLang="en-US"/>
           </a:p>
@@ -2165,7 +2175,7 @@
           <a:p>
             <a:fld id="{5659B43B-D3FA-48E7-92ED-9924A76F9674}" type="datetimeFigureOut">
               <a:rPr lang="ko-KR" altLang="en-US" smtClean="0"/>
-              <a:t>2020-02-21</a:t>
+              <a:t>2020-02-24</a:t>
             </a:fld>
             <a:endParaRPr lang="ko-KR" altLang="en-US"/>
           </a:p>
@@ -2306,7 +2316,7 @@
           <a:p>
             <a:fld id="{5659B43B-D3FA-48E7-92ED-9924A76F9674}" type="datetimeFigureOut">
               <a:rPr lang="ko-KR" altLang="en-US" smtClean="0"/>
-              <a:t>2020-02-21</a:t>
+              <a:t>2020-02-24</a:t>
             </a:fld>
             <a:endParaRPr lang="ko-KR" altLang="en-US"/>
           </a:p>
@@ -2419,7 +2429,7 @@
           <a:p>
             <a:fld id="{5659B43B-D3FA-48E7-92ED-9924A76F9674}" type="datetimeFigureOut">
               <a:rPr lang="ko-KR" altLang="en-US" smtClean="0"/>
-              <a:t>2020-02-21</a:t>
+              <a:t>2020-02-24</a:t>
             </a:fld>
             <a:endParaRPr lang="ko-KR" altLang="en-US"/>
           </a:p>
@@ -2730,7 +2740,7 @@
           <a:p>
             <a:fld id="{5659B43B-D3FA-48E7-92ED-9924A76F9674}" type="datetimeFigureOut">
               <a:rPr lang="ko-KR" altLang="en-US" smtClean="0"/>
-              <a:t>2020-02-21</a:t>
+              <a:t>2020-02-24</a:t>
             </a:fld>
             <a:endParaRPr lang="ko-KR" altLang="en-US"/>
           </a:p>
@@ -3018,7 +3028,7 @@
           <a:p>
             <a:fld id="{5659B43B-D3FA-48E7-92ED-9924A76F9674}" type="datetimeFigureOut">
               <a:rPr lang="ko-KR" altLang="en-US" smtClean="0"/>
-              <a:t>2020-02-21</a:t>
+              <a:t>2020-02-24</a:t>
             </a:fld>
             <a:endParaRPr lang="ko-KR" altLang="en-US"/>
           </a:p>
@@ -3259,7 +3269,7 @@
           <a:p>
             <a:fld id="{5659B43B-D3FA-48E7-92ED-9924A76F9674}" type="datetimeFigureOut">
               <a:rPr lang="ko-KR" altLang="en-US" smtClean="0"/>
-              <a:t>2020-02-21</a:t>
+              <a:t>2020-02-24</a:t>
             </a:fld>
             <a:endParaRPr lang="ko-KR" altLang="en-US"/>
           </a:p>
@@ -5665,7 +5675,7 @@
             <a:avLst/>
           </a:prstGeom>
           <a:solidFill>
-            <a:srgbClr val="F5F5DC"/>
+            <a:srgbClr val="FFE699"/>
           </a:solidFill>
           <a:ln>
             <a:noFill/>
@@ -5698,10 +5708,10 @@
       </p:sp>
       <p:sp>
         <p:nvSpPr>
-          <p:cNvPr id="5" name="사각형: 둥근 모서리 4">
-            <a:extLst>
-              <a:ext uri="{FF2B5EF4-FFF2-40B4-BE49-F238E27FC236}">
-                <a16:creationId xmlns:a16="http://schemas.microsoft.com/office/drawing/2014/main" id="{2CA6D02E-513D-4164-A56F-E6B4448A24DC}"/>
+          <p:cNvPr id="2" name="직사각형 1">
+            <a:extLst>
+              <a:ext uri="{FF2B5EF4-FFF2-40B4-BE49-F238E27FC236}">
+                <a16:creationId xmlns:a16="http://schemas.microsoft.com/office/drawing/2014/main" id="{F6E744BE-8AAA-43E9-AE4F-3E4FC916C147}"/>
               </a:ext>
             </a:extLst>
           </p:cNvPr>
@@ -5710,13 +5720,724 @@
         </p:nvSpPr>
         <p:spPr>
           <a:xfrm>
-            <a:off x="161488" y="132125"/>
-            <a:ext cx="11869024" cy="6593747"/>
-          </a:xfrm>
-          <a:prstGeom prst="roundRect">
-            <a:avLst>
-              <a:gd name="adj" fmla="val 2246"/>
-            </a:avLst>
+            <a:off x="2038525" y="654341"/>
+            <a:ext cx="10153475" cy="6203659"/>
+          </a:xfrm>
+          <a:prstGeom prst="rect">
+            <a:avLst/>
+          </a:prstGeom>
+          <a:solidFill>
+            <a:srgbClr val="F5F5DC"/>
+          </a:solidFill>
+          <a:ln>
+            <a:noFill/>
+          </a:ln>
+        </p:spPr>
+        <p:style>
+          <a:lnRef idx="2">
+            <a:schemeClr val="accent1">
+              <a:shade val="50000"/>
+            </a:schemeClr>
+          </a:lnRef>
+          <a:fillRef idx="1">
+            <a:schemeClr val="accent1"/>
+          </a:fillRef>
+          <a:effectRef idx="0">
+            <a:schemeClr val="accent1"/>
+          </a:effectRef>
+          <a:fontRef idx="minor">
+            <a:schemeClr val="lt1"/>
+          </a:fontRef>
+        </p:style>
+        <p:txBody>
+          <a:bodyPr rtlCol="0" anchor="ctr"/>
+          <a:lstStyle/>
+          <a:p>
+            <a:pPr algn="ctr"/>
+            <a:endParaRPr lang="ko-KR" altLang="en-US"/>
+          </a:p>
+        </p:txBody>
+      </p:sp>
+      <p:sp>
+        <p:nvSpPr>
+          <p:cNvPr id="5" name="직사각형 4">
+            <a:extLst>
+              <a:ext uri="{FF2B5EF4-FFF2-40B4-BE49-F238E27FC236}">
+                <a16:creationId xmlns:a16="http://schemas.microsoft.com/office/drawing/2014/main" id="{DE5FD6F0-8476-4767-A441-45E705DB4941}"/>
+              </a:ext>
+            </a:extLst>
+          </p:cNvPr>
+          <p:cNvSpPr/>
+          <p:nvPr/>
+        </p:nvSpPr>
+        <p:spPr>
+          <a:xfrm>
+            <a:off x="0" y="654341"/>
+            <a:ext cx="2038524" cy="6203655"/>
+          </a:xfrm>
+          <a:prstGeom prst="rect">
+            <a:avLst/>
+          </a:prstGeom>
+          <a:solidFill>
+            <a:schemeClr val="bg2">
+              <a:lumMod val="90000"/>
+            </a:schemeClr>
+          </a:solidFill>
+          <a:ln>
+            <a:noFill/>
+          </a:ln>
+        </p:spPr>
+        <p:style>
+          <a:lnRef idx="2">
+            <a:schemeClr val="accent1">
+              <a:shade val="50000"/>
+            </a:schemeClr>
+          </a:lnRef>
+          <a:fillRef idx="1">
+            <a:schemeClr val="accent1"/>
+          </a:fillRef>
+          <a:effectRef idx="0">
+            <a:schemeClr val="accent1"/>
+          </a:effectRef>
+          <a:fontRef idx="minor">
+            <a:schemeClr val="lt1"/>
+          </a:fontRef>
+        </p:style>
+        <p:txBody>
+          <a:bodyPr rtlCol="0" anchor="ctr"/>
+          <a:lstStyle/>
+          <a:p>
+            <a:pPr algn="ctr"/>
+            <a:endParaRPr lang="ko-KR" altLang="en-US"/>
+          </a:p>
+        </p:txBody>
+      </p:sp>
+      <p:sp>
+        <p:nvSpPr>
+          <p:cNvPr id="16" name="TextBox 15">
+            <a:extLst>
+              <a:ext uri="{FF2B5EF4-FFF2-40B4-BE49-F238E27FC236}">
+                <a16:creationId xmlns:a16="http://schemas.microsoft.com/office/drawing/2014/main" id="{736A3493-375A-47D3-8C7B-AFAE6F09C716}"/>
+              </a:ext>
+            </a:extLst>
+          </p:cNvPr>
+          <p:cNvSpPr txBox="1"/>
+          <p:nvPr/>
+        </p:nvSpPr>
+        <p:spPr>
+          <a:xfrm>
+            <a:off x="155481" y="70010"/>
+            <a:ext cx="715260" cy="461665"/>
+          </a:xfrm>
+          <a:prstGeom prst="rect">
+            <a:avLst/>
+          </a:prstGeom>
+          <a:noFill/>
+        </p:spPr>
+        <p:txBody>
+          <a:bodyPr wrap="none" rtlCol="0">
+            <a:spAutoFit/>
+          </a:bodyPr>
+          <a:lstStyle/>
+          <a:p>
+            <a:r>
+              <a:rPr lang="en-US" altLang="ko-KR" sz="2400" b="1" dirty="0"/>
+              <a:t>HIC</a:t>
+            </a:r>
+            <a:endParaRPr lang="ko-KR" altLang="en-US" sz="2400" b="1" dirty="0"/>
+          </a:p>
+        </p:txBody>
+      </p:sp>
+      <p:pic>
+        <p:nvPicPr>
+          <p:cNvPr id="3" name="그림 2" descr="노트북이(가) 표시된 사진&#10;&#10;자동 생성된 설명">
+            <a:extLst>
+              <a:ext uri="{FF2B5EF4-FFF2-40B4-BE49-F238E27FC236}">
+                <a16:creationId xmlns:a16="http://schemas.microsoft.com/office/drawing/2014/main" id="{A3D3E238-16F7-473D-94B0-CCC3848F1B97}"/>
+              </a:ext>
+            </a:extLst>
+          </p:cNvPr>
+          <p:cNvPicPr>
+            <a:picLocks noChangeAspect="1"/>
+          </p:cNvPicPr>
+          <p:nvPr/>
+        </p:nvPicPr>
+        <p:blipFill>
+          <a:blip r:embed="rId2">
+            <a:extLst>
+              <a:ext uri="{28A0092B-C50C-407E-A947-70E740481C1C}">
+                <a14:useLocalDpi xmlns:a14="http://schemas.microsoft.com/office/drawing/2010/main" val="0"/>
+              </a:ext>
+            </a:extLst>
+          </a:blip>
+          <a:stretch>
+            <a:fillRect/>
+          </a:stretch>
+        </p:blipFill>
+        <p:spPr>
+          <a:xfrm>
+            <a:off x="896597" y="195848"/>
+            <a:ext cx="259250" cy="226766"/>
+          </a:xfrm>
+          <a:prstGeom prst="rect">
+            <a:avLst/>
+          </a:prstGeom>
+        </p:spPr>
+      </p:pic>
+      <p:sp>
+        <p:nvSpPr>
+          <p:cNvPr id="17" name="직사각형 16">
+            <a:extLst>
+              <a:ext uri="{FF2B5EF4-FFF2-40B4-BE49-F238E27FC236}">
+                <a16:creationId xmlns:a16="http://schemas.microsoft.com/office/drawing/2014/main" id="{837371CB-11FE-4357-8A78-0942D3AC4D4A}"/>
+              </a:ext>
+            </a:extLst>
+          </p:cNvPr>
+          <p:cNvSpPr/>
+          <p:nvPr/>
+        </p:nvSpPr>
+        <p:spPr>
+          <a:xfrm>
+            <a:off x="2214693" y="111693"/>
+            <a:ext cx="956346" cy="399777"/>
+          </a:xfrm>
+          <a:prstGeom prst="rect">
+            <a:avLst/>
+          </a:prstGeom>
+          <a:noFill/>
+          <a:ln>
+            <a:noFill/>
+          </a:ln>
+        </p:spPr>
+        <p:style>
+          <a:lnRef idx="2">
+            <a:schemeClr val="accent1">
+              <a:shade val="50000"/>
+            </a:schemeClr>
+          </a:lnRef>
+          <a:fillRef idx="1">
+            <a:schemeClr val="accent1"/>
+          </a:fillRef>
+          <a:effectRef idx="0">
+            <a:schemeClr val="accent1"/>
+          </a:effectRef>
+          <a:fontRef idx="minor">
+            <a:schemeClr val="lt1"/>
+          </a:fontRef>
+        </p:style>
+        <p:txBody>
+          <a:bodyPr rtlCol="0" anchor="ctr"/>
+          <a:lstStyle/>
+          <a:p>
+            <a:pPr algn="ctr"/>
+            <a:r>
+              <a:rPr lang="ko-KR" altLang="en-US" b="1" dirty="0">
+                <a:solidFill>
+                  <a:schemeClr val="tx1"/>
+                </a:solidFill>
+                <a:effectLst>
+                  <a:glow rad="139700">
+                    <a:schemeClr val="accent2">
+                      <a:satMod val="175000"/>
+                      <a:alpha val="40000"/>
+                    </a:schemeClr>
+                  </a:glow>
+                </a:effectLst>
+              </a:rPr>
+              <a:t>순한 맛</a:t>
+            </a:r>
+          </a:p>
+        </p:txBody>
+      </p:sp>
+      <p:sp>
+        <p:nvSpPr>
+          <p:cNvPr id="18" name="직사각형 17">
+            <a:extLst>
+              <a:ext uri="{FF2B5EF4-FFF2-40B4-BE49-F238E27FC236}">
+                <a16:creationId xmlns:a16="http://schemas.microsoft.com/office/drawing/2014/main" id="{4FF86DB6-F649-4801-A6A8-760D7D937FA3}"/>
+              </a:ext>
+            </a:extLst>
+          </p:cNvPr>
+          <p:cNvSpPr/>
+          <p:nvPr/>
+        </p:nvSpPr>
+        <p:spPr>
+          <a:xfrm>
+            <a:off x="3171039" y="111693"/>
+            <a:ext cx="1208014" cy="399777"/>
+          </a:xfrm>
+          <a:prstGeom prst="rect">
+            <a:avLst/>
+          </a:prstGeom>
+          <a:noFill/>
+          <a:ln>
+            <a:noFill/>
+          </a:ln>
+        </p:spPr>
+        <p:style>
+          <a:lnRef idx="2">
+            <a:schemeClr val="accent1">
+              <a:shade val="50000"/>
+            </a:schemeClr>
+          </a:lnRef>
+          <a:fillRef idx="1">
+            <a:schemeClr val="accent1"/>
+          </a:fillRef>
+          <a:effectRef idx="0">
+            <a:schemeClr val="accent1"/>
+          </a:effectRef>
+          <a:fontRef idx="minor">
+            <a:schemeClr val="lt1"/>
+          </a:fontRef>
+        </p:style>
+        <p:txBody>
+          <a:bodyPr rtlCol="0" anchor="ctr"/>
+          <a:lstStyle/>
+          <a:p>
+            <a:pPr algn="ctr"/>
+            <a:r>
+              <a:rPr lang="ko-KR" altLang="en-US" b="1">
+                <a:solidFill>
+                  <a:schemeClr val="tx1"/>
+                </a:solidFill>
+              </a:rPr>
+              <a:t>매콤한 맛</a:t>
+            </a:r>
+            <a:endParaRPr lang="ko-KR" altLang="en-US" b="1" dirty="0">
+              <a:solidFill>
+                <a:schemeClr val="tx1"/>
+              </a:solidFill>
+            </a:endParaRPr>
+          </a:p>
+        </p:txBody>
+      </p:sp>
+      <p:sp>
+        <p:nvSpPr>
+          <p:cNvPr id="19" name="직사각형 18">
+            <a:extLst>
+              <a:ext uri="{FF2B5EF4-FFF2-40B4-BE49-F238E27FC236}">
+                <a16:creationId xmlns:a16="http://schemas.microsoft.com/office/drawing/2014/main" id="{987A205C-8FDD-4B55-B587-E67E55AAE049}"/>
+              </a:ext>
+            </a:extLst>
+          </p:cNvPr>
+          <p:cNvSpPr/>
+          <p:nvPr/>
+        </p:nvSpPr>
+        <p:spPr>
+          <a:xfrm>
+            <a:off x="4379053" y="111693"/>
+            <a:ext cx="956346" cy="399777"/>
+          </a:xfrm>
+          <a:prstGeom prst="rect">
+            <a:avLst/>
+          </a:prstGeom>
+          <a:noFill/>
+          <a:ln>
+            <a:noFill/>
+          </a:ln>
+        </p:spPr>
+        <p:style>
+          <a:lnRef idx="2">
+            <a:schemeClr val="accent1">
+              <a:shade val="50000"/>
+            </a:schemeClr>
+          </a:lnRef>
+          <a:fillRef idx="1">
+            <a:schemeClr val="accent1"/>
+          </a:fillRef>
+          <a:effectRef idx="0">
+            <a:schemeClr val="accent1"/>
+          </a:effectRef>
+          <a:fontRef idx="minor">
+            <a:schemeClr val="lt1"/>
+          </a:fontRef>
+        </p:style>
+        <p:txBody>
+          <a:bodyPr rtlCol="0" anchor="ctr"/>
+          <a:lstStyle/>
+          <a:p>
+            <a:pPr algn="ctr"/>
+            <a:r>
+              <a:rPr lang="ko-KR" altLang="en-US" b="1">
+                <a:solidFill>
+                  <a:schemeClr val="tx1"/>
+                </a:solidFill>
+              </a:rPr>
+              <a:t>매운 맛</a:t>
+            </a:r>
+            <a:endParaRPr lang="ko-KR" altLang="en-US" b="1" dirty="0">
+              <a:solidFill>
+                <a:schemeClr val="tx1"/>
+              </a:solidFill>
+            </a:endParaRPr>
+          </a:p>
+        </p:txBody>
+      </p:sp>
+      <p:sp>
+        <p:nvSpPr>
+          <p:cNvPr id="20" name="직사각형 19">
+            <a:extLst>
+              <a:ext uri="{FF2B5EF4-FFF2-40B4-BE49-F238E27FC236}">
+                <a16:creationId xmlns:a16="http://schemas.microsoft.com/office/drawing/2014/main" id="{31876C23-B946-4EC6-A69D-4E4DBD3C63A2}"/>
+              </a:ext>
+            </a:extLst>
+          </p:cNvPr>
+          <p:cNvSpPr/>
+          <p:nvPr/>
+        </p:nvSpPr>
+        <p:spPr>
+          <a:xfrm>
+            <a:off x="5335399" y="111693"/>
+            <a:ext cx="760601" cy="399777"/>
+          </a:xfrm>
+          <a:prstGeom prst="rect">
+            <a:avLst/>
+          </a:prstGeom>
+          <a:noFill/>
+          <a:ln>
+            <a:noFill/>
+          </a:ln>
+        </p:spPr>
+        <p:style>
+          <a:lnRef idx="2">
+            <a:schemeClr val="accent1">
+              <a:shade val="50000"/>
+            </a:schemeClr>
+          </a:lnRef>
+          <a:fillRef idx="1">
+            <a:schemeClr val="accent1"/>
+          </a:fillRef>
+          <a:effectRef idx="0">
+            <a:schemeClr val="accent1"/>
+          </a:effectRef>
+          <a:fontRef idx="minor">
+            <a:schemeClr val="lt1"/>
+          </a:fontRef>
+        </p:style>
+        <p:txBody>
+          <a:bodyPr rtlCol="0" anchor="ctr"/>
+          <a:lstStyle/>
+          <a:p>
+            <a:pPr algn="ctr"/>
+            <a:r>
+              <a:rPr lang="ko-KR" altLang="en-US" b="1">
+                <a:solidFill>
+                  <a:schemeClr val="tx1"/>
+                </a:solidFill>
+              </a:rPr>
+              <a:t>모두</a:t>
+            </a:r>
+            <a:endParaRPr lang="ko-KR" altLang="en-US" b="1" dirty="0">
+              <a:solidFill>
+                <a:schemeClr val="tx1"/>
+              </a:solidFill>
+            </a:endParaRPr>
+          </a:p>
+        </p:txBody>
+      </p:sp>
+      <p:sp>
+        <p:nvSpPr>
+          <p:cNvPr id="23" name="TextBox 22">
+            <a:extLst>
+              <a:ext uri="{FF2B5EF4-FFF2-40B4-BE49-F238E27FC236}">
+                <a16:creationId xmlns:a16="http://schemas.microsoft.com/office/drawing/2014/main" id="{75ED81A9-753D-46E1-B17F-02288D6F9968}"/>
+              </a:ext>
+            </a:extLst>
+          </p:cNvPr>
+          <p:cNvSpPr txBox="1"/>
+          <p:nvPr/>
+        </p:nvSpPr>
+        <p:spPr>
+          <a:xfrm>
+            <a:off x="553674" y="1076955"/>
+            <a:ext cx="1136134" cy="307777"/>
+          </a:xfrm>
+          <a:prstGeom prst="rect">
+            <a:avLst/>
+          </a:prstGeom>
+          <a:noFill/>
+        </p:spPr>
+        <p:txBody>
+          <a:bodyPr wrap="square" rtlCol="0">
+            <a:spAutoFit/>
+          </a:bodyPr>
+          <a:lstStyle/>
+          <a:p>
+            <a:r>
+              <a:rPr lang="ko-KR" altLang="en-US" sz="1400" b="1" dirty="0"/>
+              <a:t>작가 </a:t>
+            </a:r>
+            <a:r>
+              <a:rPr lang="en-US" altLang="ko-KR" sz="1400" b="1" dirty="0"/>
+              <a:t>( 39 )</a:t>
+            </a:r>
+            <a:endParaRPr lang="ko-KR" altLang="en-US" sz="1400" b="1" dirty="0"/>
+          </a:p>
+        </p:txBody>
+      </p:sp>
+      <p:pic>
+        <p:nvPicPr>
+          <p:cNvPr id="24" name="그림 23" descr="노트북이(가) 표시된 사진&#10;&#10;자동 생성된 설명">
+            <a:extLst>
+              <a:ext uri="{FF2B5EF4-FFF2-40B4-BE49-F238E27FC236}">
+                <a16:creationId xmlns:a16="http://schemas.microsoft.com/office/drawing/2014/main" id="{51841F52-6C4F-44F1-A970-7704254EE533}"/>
+              </a:ext>
+            </a:extLst>
+          </p:cNvPr>
+          <p:cNvPicPr>
+            <a:picLocks noChangeAspect="1"/>
+          </p:cNvPicPr>
+          <p:nvPr/>
+        </p:nvPicPr>
+        <p:blipFill>
+          <a:blip r:embed="rId2">
+            <a:extLst>
+              <a:ext uri="{28A0092B-C50C-407E-A947-70E740481C1C}">
+                <a14:useLocalDpi xmlns:a14="http://schemas.microsoft.com/office/drawing/2010/main" val="0"/>
+              </a:ext>
+            </a:extLst>
+          </a:blip>
+          <a:stretch>
+            <a:fillRect/>
+          </a:stretch>
+        </p:blipFill>
+        <p:spPr>
+          <a:xfrm>
+            <a:off x="230122" y="1117460"/>
+            <a:ext cx="259250" cy="226766"/>
+          </a:xfrm>
+          <a:prstGeom prst="rect">
+            <a:avLst/>
+          </a:prstGeom>
+        </p:spPr>
+      </p:pic>
+      <p:sp>
+        <p:nvSpPr>
+          <p:cNvPr id="25" name="TextBox 24">
+            <a:extLst>
+              <a:ext uri="{FF2B5EF4-FFF2-40B4-BE49-F238E27FC236}">
+                <a16:creationId xmlns:a16="http://schemas.microsoft.com/office/drawing/2014/main" id="{CF0A196E-002E-4B54-8606-52DDEB616EDB}"/>
+              </a:ext>
+            </a:extLst>
+          </p:cNvPr>
+          <p:cNvSpPr txBox="1"/>
+          <p:nvPr/>
+        </p:nvSpPr>
+        <p:spPr>
+          <a:xfrm>
+            <a:off x="553673" y="5321784"/>
+            <a:ext cx="1283513" cy="307777"/>
+          </a:xfrm>
+          <a:prstGeom prst="rect">
+            <a:avLst/>
+          </a:prstGeom>
+          <a:noFill/>
+        </p:spPr>
+        <p:txBody>
+          <a:bodyPr wrap="square" rtlCol="0">
+            <a:spAutoFit/>
+          </a:bodyPr>
+          <a:lstStyle/>
+          <a:p>
+            <a:r>
+              <a:rPr lang="ko-KR" altLang="en-US" sz="1400" b="1" dirty="0"/>
+              <a:t>캐릭터 </a:t>
+            </a:r>
+            <a:r>
+              <a:rPr lang="en-US" altLang="ko-KR" sz="1400" b="1" dirty="0"/>
+              <a:t>( 98 )</a:t>
+            </a:r>
+            <a:endParaRPr lang="ko-KR" altLang="en-US" sz="1400" b="1" dirty="0"/>
+          </a:p>
+        </p:txBody>
+      </p:sp>
+      <p:pic>
+        <p:nvPicPr>
+          <p:cNvPr id="26" name="그림 25" descr="노트북이(가) 표시된 사진&#10;&#10;자동 생성된 설명">
+            <a:extLst>
+              <a:ext uri="{FF2B5EF4-FFF2-40B4-BE49-F238E27FC236}">
+                <a16:creationId xmlns:a16="http://schemas.microsoft.com/office/drawing/2014/main" id="{78517CD4-013C-483C-8F3C-F051B8B5FA8B}"/>
+              </a:ext>
+            </a:extLst>
+          </p:cNvPr>
+          <p:cNvPicPr>
+            <a:picLocks noChangeAspect="1"/>
+          </p:cNvPicPr>
+          <p:nvPr/>
+        </p:nvPicPr>
+        <p:blipFill>
+          <a:blip r:embed="rId2">
+            <a:extLst>
+              <a:ext uri="{28A0092B-C50C-407E-A947-70E740481C1C}">
+                <a14:useLocalDpi xmlns:a14="http://schemas.microsoft.com/office/drawing/2010/main" val="0"/>
+              </a:ext>
+            </a:extLst>
+          </a:blip>
+          <a:stretch>
+            <a:fillRect/>
+          </a:stretch>
+        </p:blipFill>
+        <p:spPr>
+          <a:xfrm rot="16200000">
+            <a:off x="230122" y="5362289"/>
+            <a:ext cx="259250" cy="226766"/>
+          </a:xfrm>
+          <a:prstGeom prst="rect">
+            <a:avLst/>
+          </a:prstGeom>
+        </p:spPr>
+      </p:pic>
+      <p:sp>
+        <p:nvSpPr>
+          <p:cNvPr id="27" name="TextBox 26">
+            <a:extLst>
+              <a:ext uri="{FF2B5EF4-FFF2-40B4-BE49-F238E27FC236}">
+                <a16:creationId xmlns:a16="http://schemas.microsoft.com/office/drawing/2014/main" id="{A7DA0ED5-6015-4833-AEC4-BF23443B21CF}"/>
+              </a:ext>
+            </a:extLst>
+          </p:cNvPr>
+          <p:cNvSpPr txBox="1"/>
+          <p:nvPr/>
+        </p:nvSpPr>
+        <p:spPr>
+          <a:xfrm>
+            <a:off x="230122" y="1635192"/>
+            <a:ext cx="1083951" cy="276999"/>
+          </a:xfrm>
+          <a:prstGeom prst="rect">
+            <a:avLst/>
+          </a:prstGeom>
+          <a:noFill/>
+        </p:spPr>
+        <p:txBody>
+          <a:bodyPr wrap="none" rtlCol="0">
+            <a:spAutoFit/>
+          </a:bodyPr>
+          <a:lstStyle/>
+          <a:p>
+            <a:r>
+              <a:rPr lang="en-US" altLang="ko-KR" sz="1200" b="1" dirty="0"/>
+              <a:t>MMM</a:t>
+            </a:r>
+            <a:r>
+              <a:rPr lang="en-US" altLang="ko-KR" sz="1200" dirty="0"/>
+              <a:t> </a:t>
+            </a:r>
+            <a:r>
+              <a:rPr lang="en-US" altLang="ko-KR" sz="1200" b="1" dirty="0"/>
+              <a:t>( 29 )</a:t>
+            </a:r>
+            <a:endParaRPr lang="ko-KR" altLang="en-US" sz="1200" b="1" dirty="0"/>
+          </a:p>
+        </p:txBody>
+      </p:sp>
+      <p:sp>
+        <p:nvSpPr>
+          <p:cNvPr id="28" name="TextBox 27">
+            <a:extLst>
+              <a:ext uri="{FF2B5EF4-FFF2-40B4-BE49-F238E27FC236}">
+                <a16:creationId xmlns:a16="http://schemas.microsoft.com/office/drawing/2014/main" id="{C868074B-72D0-4600-924F-1170408A9156}"/>
+              </a:ext>
+            </a:extLst>
+          </p:cNvPr>
+          <p:cNvSpPr txBox="1"/>
+          <p:nvPr/>
+        </p:nvSpPr>
+        <p:spPr>
+          <a:xfrm>
+            <a:off x="223924" y="2110912"/>
+            <a:ext cx="1098378" cy="276999"/>
+          </a:xfrm>
+          <a:prstGeom prst="rect">
+            <a:avLst/>
+          </a:prstGeom>
+          <a:noFill/>
+        </p:spPr>
+        <p:txBody>
+          <a:bodyPr wrap="none" rtlCol="0">
+            <a:spAutoFit/>
+          </a:bodyPr>
+          <a:lstStyle/>
+          <a:p>
+            <a:r>
+              <a:rPr lang="ko-KR" altLang="en-US" sz="1200" b="1" dirty="0" err="1"/>
+              <a:t>하군하</a:t>
+            </a:r>
+            <a:r>
+              <a:rPr lang="en-US" altLang="ko-KR" sz="1200" dirty="0"/>
+              <a:t> </a:t>
+            </a:r>
+            <a:r>
+              <a:rPr lang="en-US" altLang="ko-KR" sz="1200" b="1" dirty="0"/>
+              <a:t>( 18 )</a:t>
+            </a:r>
+            <a:endParaRPr lang="ko-KR" altLang="en-US" sz="1200" b="1" dirty="0"/>
+          </a:p>
+        </p:txBody>
+      </p:sp>
+      <p:sp>
+        <p:nvSpPr>
+          <p:cNvPr id="29" name="TextBox 28">
+            <a:extLst>
+              <a:ext uri="{FF2B5EF4-FFF2-40B4-BE49-F238E27FC236}">
+                <a16:creationId xmlns:a16="http://schemas.microsoft.com/office/drawing/2014/main" id="{A8494ADD-CCC3-4AB3-9932-39C8AA651AED}"/>
+              </a:ext>
+            </a:extLst>
+          </p:cNvPr>
+          <p:cNvSpPr txBox="1"/>
+          <p:nvPr/>
+        </p:nvSpPr>
+        <p:spPr>
+          <a:xfrm>
+            <a:off x="223924" y="2583776"/>
+            <a:ext cx="1713931" cy="276999"/>
+          </a:xfrm>
+          <a:prstGeom prst="rect">
+            <a:avLst/>
+          </a:prstGeom>
+          <a:noFill/>
+        </p:spPr>
+        <p:txBody>
+          <a:bodyPr wrap="none" rtlCol="0">
+            <a:spAutoFit/>
+          </a:bodyPr>
+          <a:lstStyle/>
+          <a:p>
+            <a:r>
+              <a:rPr lang="ko-KR" altLang="en-US" sz="1200" b="1" dirty="0" err="1"/>
+              <a:t>정신병자삐칠이</a:t>
+            </a:r>
+            <a:r>
+              <a:rPr lang="ko-KR" altLang="en-US" sz="1200" b="1" dirty="0"/>
+              <a:t> </a:t>
+            </a:r>
+            <a:r>
+              <a:rPr lang="en-US" altLang="ko-KR" sz="1200" b="1" dirty="0"/>
+              <a:t>( 23 )</a:t>
+            </a:r>
+            <a:endParaRPr lang="ko-KR" altLang="en-US" sz="1200" b="1" dirty="0"/>
+          </a:p>
+        </p:txBody>
+      </p:sp>
+      <p:sp>
+        <p:nvSpPr>
+          <p:cNvPr id="30" name="직사각형 29">
+            <a:extLst>
+              <a:ext uri="{FF2B5EF4-FFF2-40B4-BE49-F238E27FC236}">
+                <a16:creationId xmlns:a16="http://schemas.microsoft.com/office/drawing/2014/main" id="{72B70C3C-F415-4E06-BAC5-03ED2B615D2D}"/>
+              </a:ext>
+            </a:extLst>
+          </p:cNvPr>
+          <p:cNvSpPr/>
+          <p:nvPr/>
+        </p:nvSpPr>
+        <p:spPr>
+          <a:xfrm>
+            <a:off x="10686522" y="111693"/>
+            <a:ext cx="1012271" cy="399777"/>
+          </a:xfrm>
+          <a:prstGeom prst="rect">
+            <a:avLst/>
           </a:prstGeom>
           <a:solidFill>
             <a:srgbClr val="F5F5DC"/>
@@ -5750,16 +6471,59 @@
           <a:lstStyle/>
           <a:p>
             <a:pPr algn="ctr"/>
-            <a:endParaRPr lang="ko-KR" altLang="en-US"/>
-          </a:p>
-        </p:txBody>
-      </p:sp>
-      <p:sp>
-        <p:nvSpPr>
-          <p:cNvPr id="7" name="사각형: 둥근 모서리 6">
-            <a:extLst>
-              <a:ext uri="{FF2B5EF4-FFF2-40B4-BE49-F238E27FC236}">
-                <a16:creationId xmlns:a16="http://schemas.microsoft.com/office/drawing/2014/main" id="{7770C2C1-0F77-4E83-9C6F-ADC12A91EE61}"/>
+            <a:r>
+              <a:rPr lang="ko-KR" altLang="en-US" b="1" dirty="0">
+                <a:solidFill>
+                  <a:schemeClr val="tx1"/>
+                </a:solidFill>
+              </a:rPr>
+              <a:t>업로드</a:t>
+            </a:r>
+          </a:p>
+        </p:txBody>
+      </p:sp>
+      <p:sp>
+        <p:nvSpPr>
+          <p:cNvPr id="32" name="TextBox 31">
+            <a:extLst>
+              <a:ext uri="{FF2B5EF4-FFF2-40B4-BE49-F238E27FC236}">
+                <a16:creationId xmlns:a16="http://schemas.microsoft.com/office/drawing/2014/main" id="{5F182294-4370-4BC8-9B76-BDC247184837}"/>
+              </a:ext>
+            </a:extLst>
+          </p:cNvPr>
+          <p:cNvSpPr txBox="1"/>
+          <p:nvPr/>
+        </p:nvSpPr>
+        <p:spPr>
+          <a:xfrm>
+            <a:off x="223924" y="3056640"/>
+            <a:ext cx="320922" cy="276999"/>
+          </a:xfrm>
+          <a:prstGeom prst="rect">
+            <a:avLst/>
+          </a:prstGeom>
+          <a:noFill/>
+        </p:spPr>
+        <p:txBody>
+          <a:bodyPr wrap="none" rtlCol="0">
+            <a:spAutoFit/>
+          </a:bodyPr>
+          <a:lstStyle/>
+          <a:p>
+            <a:r>
+              <a:rPr lang="en-US" altLang="ko-KR" sz="1200" b="1" dirty="0"/>
+              <a:t>…</a:t>
+            </a:r>
+            <a:endParaRPr lang="ko-KR" altLang="en-US" sz="1200" b="1" dirty="0"/>
+          </a:p>
+        </p:txBody>
+      </p:sp>
+      <p:sp>
+        <p:nvSpPr>
+          <p:cNvPr id="33" name="직사각형 32">
+            <a:extLst>
+              <a:ext uri="{FF2B5EF4-FFF2-40B4-BE49-F238E27FC236}">
+                <a16:creationId xmlns:a16="http://schemas.microsoft.com/office/drawing/2014/main" id="{BABC38BE-98AF-4CE1-8AE1-66294DA81FE2}"/>
               </a:ext>
             </a:extLst>
           </p:cNvPr>
@@ -5768,23 +6532,15 @@
         </p:nvSpPr>
         <p:spPr>
           <a:xfrm>
-            <a:off x="457199" y="394282"/>
-            <a:ext cx="2386669" cy="6069435"/>
-          </a:xfrm>
-          <a:prstGeom prst="roundRect">
-            <a:avLst>
-              <a:gd name="adj" fmla="val 3717"/>
-            </a:avLst>
-          </a:prstGeom>
-          <a:solidFill>
-            <a:srgbClr val="F5F5DC"/>
-          </a:solidFill>
+            <a:off x="7052346" y="111693"/>
+            <a:ext cx="1311478" cy="399777"/>
+          </a:xfrm>
+          <a:prstGeom prst="rect">
+            <a:avLst/>
+          </a:prstGeom>
+          <a:noFill/>
           <a:ln>
-            <a:solidFill>
-              <a:schemeClr val="bg2">
-                <a:lumMod val="75000"/>
-              </a:schemeClr>
-            </a:solidFill>
+            <a:noFill/>
           </a:ln>
         </p:spPr>
         <p:style>
@@ -5808,16 +6564,31 @@
           <a:lstStyle/>
           <a:p>
             <a:pPr algn="ctr"/>
-            <a:endParaRPr lang="ko-KR" altLang="en-US"/>
-          </a:p>
-        </p:txBody>
-      </p:sp>
-      <p:sp>
-        <p:nvSpPr>
-          <p:cNvPr id="9" name="직사각형 8">
-            <a:extLst>
-              <a:ext uri="{FF2B5EF4-FFF2-40B4-BE49-F238E27FC236}">
-                <a16:creationId xmlns:a16="http://schemas.microsoft.com/office/drawing/2014/main" id="{B42D4978-E613-4F58-865B-E5E139EBC306}"/>
+            <a:r>
+              <a:rPr lang="ko-KR" altLang="en-US" b="1" dirty="0">
+                <a:solidFill>
+                  <a:schemeClr val="tx1"/>
+                </a:solidFill>
+                <a:effectLst>
+                  <a:glow rad="228600">
+                    <a:schemeClr val="accent5">
+                      <a:satMod val="175000"/>
+                      <a:alpha val="40000"/>
+                    </a:schemeClr>
+                  </a:glow>
+                </a:effectLst>
+              </a:rPr>
+              <a:t>일러스트</a:t>
+            </a:r>
+          </a:p>
+        </p:txBody>
+      </p:sp>
+      <p:sp>
+        <p:nvSpPr>
+          <p:cNvPr id="34" name="직사각형 33">
+            <a:extLst>
+              <a:ext uri="{FF2B5EF4-FFF2-40B4-BE49-F238E27FC236}">
+                <a16:creationId xmlns:a16="http://schemas.microsoft.com/office/drawing/2014/main" id="{2CE966E8-6580-4ADB-B11B-072D6D8282EA}"/>
               </a:ext>
             </a:extLst>
           </p:cNvPr>
@@ -5826,21 +6597,15 @@
         </p:nvSpPr>
         <p:spPr>
           <a:xfrm>
-            <a:off x="755009" y="1258347"/>
-            <a:ext cx="1789433" cy="4079147"/>
-          </a:xfrm>
-          <a:prstGeom prst="rect">
-            <a:avLst/>
-          </a:prstGeom>
-          <a:solidFill>
-            <a:srgbClr val="F5F5DC"/>
-          </a:solidFill>
+            <a:off x="8363824" y="111693"/>
+            <a:ext cx="1106475" cy="399777"/>
+          </a:xfrm>
+          <a:prstGeom prst="rect">
+            <a:avLst/>
+          </a:prstGeom>
+          <a:noFill/>
           <a:ln>
-            <a:solidFill>
-              <a:schemeClr val="bg2">
-                <a:lumMod val="75000"/>
-              </a:schemeClr>
-            </a:solidFill>
+            <a:noFill/>
           </a:ln>
         </p:spPr>
         <p:style>
@@ -5864,296 +6629,129 @@
           <a:lstStyle/>
           <a:p>
             <a:pPr algn="ctr"/>
-            <a:endParaRPr lang="ko-KR" altLang="en-US" dirty="0"/>
-          </a:p>
-        </p:txBody>
-      </p:sp>
-      <p:sp>
-        <p:nvSpPr>
-          <p:cNvPr id="11" name="직사각형 10">
-            <a:extLst>
-              <a:ext uri="{FF2B5EF4-FFF2-40B4-BE49-F238E27FC236}">
-                <a16:creationId xmlns:a16="http://schemas.microsoft.com/office/drawing/2014/main" id="{2A303B22-0EBC-41EB-825D-2953C466F2B9}"/>
-              </a:ext>
-            </a:extLst>
-          </p:cNvPr>
-          <p:cNvSpPr/>
-          <p:nvPr/>
-        </p:nvSpPr>
-        <p:spPr>
-          <a:xfrm>
-            <a:off x="755010" y="872455"/>
-            <a:ext cx="1789432" cy="385893"/>
-          </a:xfrm>
-          <a:prstGeom prst="rect">
-            <a:avLst/>
-          </a:prstGeom>
-          <a:solidFill>
-            <a:srgbClr val="F5F5DC"/>
-          </a:solidFill>
-          <a:ln>
-            <a:solidFill>
-              <a:schemeClr val="bg2">
-                <a:lumMod val="75000"/>
-              </a:schemeClr>
-            </a:solidFill>
-          </a:ln>
-        </p:spPr>
-        <p:style>
-          <a:lnRef idx="2">
-            <a:schemeClr val="accent1">
-              <a:shade val="50000"/>
-            </a:schemeClr>
-          </a:lnRef>
-          <a:fillRef idx="1">
-            <a:schemeClr val="accent1"/>
-          </a:fillRef>
-          <a:effectRef idx="0">
-            <a:schemeClr val="accent1"/>
-          </a:effectRef>
-          <a:fontRef idx="minor">
-            <a:schemeClr val="lt1"/>
-          </a:fontRef>
-        </p:style>
-        <p:txBody>
-          <a:bodyPr rtlCol="0" anchor="ctr"/>
-          <a:lstStyle/>
-          <a:p>
-            <a:r>
-              <a:rPr lang="ko-KR" altLang="en-US" sz="1400" b="1" dirty="0">
+            <a:r>
+              <a:rPr lang="ko-KR" altLang="en-US" b="1" dirty="0">
                 <a:solidFill>
                   <a:schemeClr val="tx1"/>
                 </a:solidFill>
               </a:rPr>
-              <a:t> 작가 </a:t>
-            </a:r>
-            <a:r>
-              <a:rPr lang="en-US" altLang="ko-KR" sz="1400" b="1" dirty="0">
-                <a:solidFill>
-                  <a:schemeClr val="tx1"/>
-                </a:solidFill>
-              </a:rPr>
-              <a:t>(39)</a:t>
-            </a:r>
-            <a:endParaRPr lang="ko-KR" altLang="en-US" sz="1400" b="1" dirty="0">
-              <a:solidFill>
-                <a:schemeClr val="tx1"/>
-              </a:solidFill>
-            </a:endParaRPr>
-          </a:p>
-        </p:txBody>
-      </p:sp>
-      <p:sp>
-        <p:nvSpPr>
-          <p:cNvPr id="12" name="직사각형 11">
-            <a:extLst>
-              <a:ext uri="{FF2B5EF4-FFF2-40B4-BE49-F238E27FC236}">
-                <a16:creationId xmlns:a16="http://schemas.microsoft.com/office/drawing/2014/main" id="{B414BA08-F5FE-4338-AAE8-536AFD2FC650}"/>
-              </a:ext>
-            </a:extLst>
-          </p:cNvPr>
-          <p:cNvSpPr/>
+              <a:t>만화</a:t>
+            </a:r>
+          </a:p>
+        </p:txBody>
+      </p:sp>
+      <p:pic>
+        <p:nvPicPr>
+          <p:cNvPr id="36" name="그림 35">
+            <a:extLst>
+              <a:ext uri="{FF2B5EF4-FFF2-40B4-BE49-F238E27FC236}">
+                <a16:creationId xmlns:a16="http://schemas.microsoft.com/office/drawing/2014/main" id="{1495D0F3-97D7-4327-A329-09B21C32045C}"/>
+              </a:ext>
+            </a:extLst>
+          </p:cNvPr>
+          <p:cNvPicPr>
+            <a:picLocks noChangeAspect="1"/>
+          </p:cNvPicPr>
           <p:nvPr/>
-        </p:nvSpPr>
-        <p:spPr>
-          <a:xfrm>
-            <a:off x="755010" y="5599652"/>
-            <a:ext cx="1789432" cy="385893"/>
-          </a:xfrm>
-          <a:prstGeom prst="rect">
-            <a:avLst/>
-          </a:prstGeom>
-          <a:solidFill>
-            <a:srgbClr val="F5F5DC"/>
-          </a:solidFill>
-          <a:ln>
-            <a:solidFill>
-              <a:schemeClr val="bg2">
-                <a:lumMod val="75000"/>
-              </a:schemeClr>
-            </a:solidFill>
-          </a:ln>
-        </p:spPr>
-        <p:style>
-          <a:lnRef idx="2">
-            <a:schemeClr val="accent1">
-              <a:shade val="50000"/>
-            </a:schemeClr>
-          </a:lnRef>
-          <a:fillRef idx="1">
-            <a:schemeClr val="accent1"/>
-          </a:fillRef>
-          <a:effectRef idx="0">
-            <a:schemeClr val="accent1"/>
-          </a:effectRef>
-          <a:fontRef idx="minor">
-            <a:schemeClr val="lt1"/>
-          </a:fontRef>
-        </p:style>
-        <p:txBody>
-          <a:bodyPr rtlCol="0" anchor="ctr"/>
-          <a:lstStyle/>
-          <a:p>
-            <a:r>
-              <a:rPr lang="ko-KR" altLang="en-US" sz="1400" b="1" dirty="0">
-                <a:solidFill>
-                  <a:schemeClr val="tx1"/>
-                </a:solidFill>
-              </a:rPr>
-              <a:t> 캐릭터 </a:t>
-            </a:r>
-            <a:r>
-              <a:rPr lang="en-US" altLang="ko-KR" sz="1400" b="1" dirty="0">
-                <a:solidFill>
-                  <a:schemeClr val="tx1"/>
-                </a:solidFill>
-              </a:rPr>
-              <a:t>(98)</a:t>
-            </a:r>
-            <a:endParaRPr lang="ko-KR" altLang="en-US" sz="1400" b="1" dirty="0">
-              <a:solidFill>
-                <a:schemeClr val="tx1"/>
-              </a:solidFill>
-            </a:endParaRPr>
-          </a:p>
-        </p:txBody>
-      </p:sp>
-      <p:sp>
-        <p:nvSpPr>
-          <p:cNvPr id="13" name="TextBox 12">
-            <a:extLst>
-              <a:ext uri="{FF2B5EF4-FFF2-40B4-BE49-F238E27FC236}">
-                <a16:creationId xmlns:a16="http://schemas.microsoft.com/office/drawing/2014/main" id="{4B6887DF-C7FA-4D98-9B75-CAAD230023A3}"/>
-              </a:ext>
-            </a:extLst>
-          </p:cNvPr>
-          <p:cNvSpPr txBox="1"/>
+        </p:nvPicPr>
+        <p:blipFill>
+          <a:blip r:embed="rId3">
+            <a:extLst>
+              <a:ext uri="{28A0092B-C50C-407E-A947-70E740481C1C}">
+                <a14:useLocalDpi xmlns:a14="http://schemas.microsoft.com/office/drawing/2010/main" val="0"/>
+              </a:ext>
+            </a:extLst>
+          </a:blip>
+          <a:stretch>
+            <a:fillRect/>
+          </a:stretch>
+        </p:blipFill>
+        <p:spPr>
+          <a:xfrm>
+            <a:off x="2844590" y="1230843"/>
+            <a:ext cx="1016016" cy="1016016"/>
+          </a:xfrm>
+          <a:prstGeom prst="rect">
+            <a:avLst/>
+          </a:prstGeom>
+        </p:spPr>
+      </p:pic>
+      <p:pic>
+        <p:nvPicPr>
+          <p:cNvPr id="39" name="그림 38" descr="그리기이(가) 표시된 사진&#10;&#10;자동 생성된 설명">
+            <a:extLst>
+              <a:ext uri="{FF2B5EF4-FFF2-40B4-BE49-F238E27FC236}">
+                <a16:creationId xmlns:a16="http://schemas.microsoft.com/office/drawing/2014/main" id="{10C35731-0410-4DB5-A7AB-1690EFA6DB48}"/>
+              </a:ext>
+            </a:extLst>
+          </p:cNvPr>
+          <p:cNvPicPr>
+            <a:picLocks noChangeAspect="1"/>
+          </p:cNvPicPr>
           <p:nvPr/>
-        </p:nvSpPr>
-        <p:spPr>
-          <a:xfrm>
-            <a:off x="830511" y="1358933"/>
-            <a:ext cx="1083951" cy="276999"/>
-          </a:xfrm>
-          <a:prstGeom prst="rect">
-            <a:avLst/>
-          </a:prstGeom>
-          <a:noFill/>
-        </p:spPr>
-        <p:txBody>
-          <a:bodyPr wrap="none" rtlCol="0">
-            <a:spAutoFit/>
-          </a:bodyPr>
-          <a:lstStyle/>
-          <a:p>
-            <a:r>
-              <a:rPr lang="en-US" altLang="ko-KR" sz="1200" b="1" dirty="0"/>
-              <a:t>MMM</a:t>
-            </a:r>
-            <a:r>
-              <a:rPr lang="en-US" altLang="ko-KR" sz="1200" dirty="0"/>
-              <a:t> </a:t>
-            </a:r>
-            <a:r>
-              <a:rPr lang="en-US" altLang="ko-KR" sz="1200" b="1" dirty="0"/>
-              <a:t>( 29 )</a:t>
-            </a:r>
-            <a:endParaRPr lang="ko-KR" altLang="en-US" sz="1200" b="1" dirty="0"/>
-          </a:p>
-        </p:txBody>
-      </p:sp>
-      <p:sp>
-        <p:nvSpPr>
-          <p:cNvPr id="14" name="TextBox 13">
-            <a:extLst>
-              <a:ext uri="{FF2B5EF4-FFF2-40B4-BE49-F238E27FC236}">
-                <a16:creationId xmlns:a16="http://schemas.microsoft.com/office/drawing/2014/main" id="{7E76D786-178B-4C70-9D58-205BB2EBDD35}"/>
-              </a:ext>
-            </a:extLst>
-          </p:cNvPr>
-          <p:cNvSpPr txBox="1"/>
+        </p:nvPicPr>
+        <p:blipFill>
+          <a:blip r:embed="rId4">
+            <a:extLst>
+              <a:ext uri="{28A0092B-C50C-407E-A947-70E740481C1C}">
+                <a14:useLocalDpi xmlns:a14="http://schemas.microsoft.com/office/drawing/2010/main" val="0"/>
+              </a:ext>
+            </a:extLst>
+          </a:blip>
+          <a:stretch>
+            <a:fillRect/>
+          </a:stretch>
+        </p:blipFill>
+        <p:spPr>
+          <a:xfrm>
+            <a:off x="4550093" y="1230843"/>
+            <a:ext cx="1016016" cy="1016016"/>
+          </a:xfrm>
+          <a:prstGeom prst="rect">
+            <a:avLst/>
+          </a:prstGeom>
+        </p:spPr>
+      </p:pic>
+      <p:pic>
+        <p:nvPicPr>
+          <p:cNvPr id="41" name="그림 40">
+            <a:extLst>
+              <a:ext uri="{FF2B5EF4-FFF2-40B4-BE49-F238E27FC236}">
+                <a16:creationId xmlns:a16="http://schemas.microsoft.com/office/drawing/2014/main" id="{5411128C-20E9-438E-AB4C-3F1187266C69}"/>
+              </a:ext>
+            </a:extLst>
+          </p:cNvPr>
+          <p:cNvPicPr>
+            <a:picLocks noChangeAspect="1"/>
+          </p:cNvPicPr>
           <p:nvPr/>
-        </p:nvSpPr>
-        <p:spPr>
-          <a:xfrm>
-            <a:off x="830511" y="1783460"/>
-            <a:ext cx="1098378" cy="276999"/>
-          </a:xfrm>
-          <a:prstGeom prst="rect">
-            <a:avLst/>
-          </a:prstGeom>
-          <a:noFill/>
-        </p:spPr>
-        <p:txBody>
-          <a:bodyPr wrap="none" rtlCol="0">
-            <a:spAutoFit/>
-          </a:bodyPr>
-          <a:lstStyle/>
-          <a:p>
-            <a:r>
-              <a:rPr lang="ko-KR" altLang="en-US" sz="1200" b="1" dirty="0" err="1"/>
-              <a:t>하군하</a:t>
-            </a:r>
-            <a:r>
-              <a:rPr lang="en-US" altLang="ko-KR" sz="1200" dirty="0"/>
-              <a:t> </a:t>
-            </a:r>
-            <a:r>
-              <a:rPr lang="en-US" altLang="ko-KR" sz="1200" b="1" dirty="0"/>
-              <a:t>( 18 )</a:t>
-            </a:r>
-            <a:endParaRPr lang="ko-KR" altLang="en-US" sz="1200" b="1" dirty="0"/>
-          </a:p>
-        </p:txBody>
-      </p:sp>
-      <p:sp>
-        <p:nvSpPr>
-          <p:cNvPr id="15" name="TextBox 14">
-            <a:extLst>
-              <a:ext uri="{FF2B5EF4-FFF2-40B4-BE49-F238E27FC236}">
-                <a16:creationId xmlns:a16="http://schemas.microsoft.com/office/drawing/2014/main" id="{10A7C299-FFFC-480B-A744-5D5B316063C7}"/>
-              </a:ext>
-            </a:extLst>
-          </p:cNvPr>
-          <p:cNvSpPr txBox="1"/>
-          <p:nvPr/>
-        </p:nvSpPr>
-        <p:spPr>
-          <a:xfrm>
-            <a:off x="830511" y="2205722"/>
-            <a:ext cx="1713931" cy="276999"/>
-          </a:xfrm>
-          <a:prstGeom prst="rect">
-            <a:avLst/>
-          </a:prstGeom>
-          <a:noFill/>
-        </p:spPr>
-        <p:txBody>
-          <a:bodyPr wrap="none" rtlCol="0">
-            <a:spAutoFit/>
-          </a:bodyPr>
-          <a:lstStyle/>
-          <a:p>
-            <a:r>
-              <a:rPr lang="ko-KR" altLang="en-US" sz="1200" b="1" dirty="0" err="1"/>
-              <a:t>정신병자삐칠이</a:t>
-            </a:r>
-            <a:r>
-              <a:rPr lang="ko-KR" altLang="en-US" sz="1200" b="1" dirty="0"/>
-              <a:t> </a:t>
-            </a:r>
-            <a:r>
-              <a:rPr lang="en-US" altLang="ko-KR" sz="1200" b="1" dirty="0"/>
-              <a:t>( 23 )</a:t>
-            </a:r>
-            <a:endParaRPr lang="ko-KR" altLang="en-US" sz="1200" b="1" dirty="0"/>
-          </a:p>
-        </p:txBody>
-      </p:sp>
+        </p:nvPicPr>
+        <p:blipFill>
+          <a:blip r:embed="rId5">
+            <a:extLst>
+              <a:ext uri="{28A0092B-C50C-407E-A947-70E740481C1C}">
+                <a14:useLocalDpi xmlns:a14="http://schemas.microsoft.com/office/drawing/2010/main" val="0"/>
+              </a:ext>
+            </a:extLst>
+          </a:blip>
+          <a:stretch>
+            <a:fillRect/>
+          </a:stretch>
+        </p:blipFill>
+        <p:spPr>
+          <a:xfrm>
+            <a:off x="6255596" y="1238665"/>
+            <a:ext cx="1029525" cy="1029525"/>
+          </a:xfrm>
+          <a:prstGeom prst="rect">
+            <a:avLst/>
+          </a:prstGeom>
+        </p:spPr>
+      </p:pic>
     </p:spTree>
     <p:extLst>
       <p:ext uri="{BB962C8B-B14F-4D97-AF65-F5344CB8AC3E}">
-        <p14:creationId xmlns:p14="http://schemas.microsoft.com/office/powerpoint/2010/main" val="274572738"/>
+        <p14:creationId xmlns:p14="http://schemas.microsoft.com/office/powerpoint/2010/main" val="3581584720"/>
       </p:ext>
     </p:extLst>
   </p:cSld>
@@ -6182,6 +6780,1555 @@
       </p:grpSpPr>
       <p:sp>
         <p:nvSpPr>
+          <p:cNvPr id="4" name="직사각형 3">
+            <a:extLst>
+              <a:ext uri="{FF2B5EF4-FFF2-40B4-BE49-F238E27FC236}">
+                <a16:creationId xmlns:a16="http://schemas.microsoft.com/office/drawing/2014/main" id="{2C8729BE-AB31-4E9B-A2B8-913EBA6DDACB}"/>
+              </a:ext>
+            </a:extLst>
+          </p:cNvPr>
+          <p:cNvSpPr/>
+          <p:nvPr/>
+        </p:nvSpPr>
+        <p:spPr>
+          <a:xfrm>
+            <a:off x="0" y="0"/>
+            <a:ext cx="12192000" cy="6858000"/>
+          </a:xfrm>
+          <a:prstGeom prst="rect">
+            <a:avLst/>
+          </a:prstGeom>
+          <a:solidFill>
+            <a:srgbClr val="F5F5DC"/>
+          </a:solidFill>
+          <a:ln>
+            <a:noFill/>
+          </a:ln>
+        </p:spPr>
+        <p:style>
+          <a:lnRef idx="2">
+            <a:schemeClr val="accent1">
+              <a:shade val="50000"/>
+            </a:schemeClr>
+          </a:lnRef>
+          <a:fillRef idx="1">
+            <a:schemeClr val="accent1"/>
+          </a:fillRef>
+          <a:effectRef idx="0">
+            <a:schemeClr val="accent1"/>
+          </a:effectRef>
+          <a:fontRef idx="minor">
+            <a:schemeClr val="lt1"/>
+          </a:fontRef>
+        </p:style>
+        <p:txBody>
+          <a:bodyPr rtlCol="0" anchor="ctr"/>
+          <a:lstStyle/>
+          <a:p>
+            <a:pPr algn="ctr"/>
+            <a:endParaRPr lang="ko-KR" altLang="en-US" dirty="0"/>
+          </a:p>
+        </p:txBody>
+      </p:sp>
+      <p:sp>
+        <p:nvSpPr>
+          <p:cNvPr id="16" name="TextBox 15">
+            <a:extLst>
+              <a:ext uri="{FF2B5EF4-FFF2-40B4-BE49-F238E27FC236}">
+                <a16:creationId xmlns:a16="http://schemas.microsoft.com/office/drawing/2014/main" id="{736A3493-375A-47D3-8C7B-AFAE6F09C716}"/>
+              </a:ext>
+            </a:extLst>
+          </p:cNvPr>
+          <p:cNvSpPr txBox="1"/>
+          <p:nvPr/>
+        </p:nvSpPr>
+        <p:spPr>
+          <a:xfrm>
+            <a:off x="155481" y="70010"/>
+            <a:ext cx="715260" cy="461665"/>
+          </a:xfrm>
+          <a:prstGeom prst="rect">
+            <a:avLst/>
+          </a:prstGeom>
+          <a:noFill/>
+        </p:spPr>
+        <p:txBody>
+          <a:bodyPr wrap="none" rtlCol="0">
+            <a:spAutoFit/>
+          </a:bodyPr>
+          <a:lstStyle/>
+          <a:p>
+            <a:r>
+              <a:rPr lang="en-US" altLang="ko-KR" sz="2400" b="1" dirty="0"/>
+              <a:t>HIC</a:t>
+            </a:r>
+            <a:endParaRPr lang="ko-KR" altLang="en-US" sz="2400" b="1" dirty="0"/>
+          </a:p>
+        </p:txBody>
+      </p:sp>
+      <p:pic>
+        <p:nvPicPr>
+          <p:cNvPr id="3" name="그림 2" descr="노트북이(가) 표시된 사진&#10;&#10;자동 생성된 설명">
+            <a:extLst>
+              <a:ext uri="{FF2B5EF4-FFF2-40B4-BE49-F238E27FC236}">
+                <a16:creationId xmlns:a16="http://schemas.microsoft.com/office/drawing/2014/main" id="{A3D3E238-16F7-473D-94B0-CCC3848F1B97}"/>
+              </a:ext>
+            </a:extLst>
+          </p:cNvPr>
+          <p:cNvPicPr>
+            <a:picLocks noChangeAspect="1"/>
+          </p:cNvPicPr>
+          <p:nvPr/>
+        </p:nvPicPr>
+        <p:blipFill>
+          <a:blip r:embed="rId2">
+            <a:extLst>
+              <a:ext uri="{28A0092B-C50C-407E-A947-70E740481C1C}">
+                <a14:useLocalDpi xmlns:a14="http://schemas.microsoft.com/office/drawing/2010/main" val="0"/>
+              </a:ext>
+            </a:extLst>
+          </a:blip>
+          <a:stretch>
+            <a:fillRect/>
+          </a:stretch>
+        </p:blipFill>
+        <p:spPr>
+          <a:xfrm>
+            <a:off x="896597" y="195848"/>
+            <a:ext cx="259250" cy="226766"/>
+          </a:xfrm>
+          <a:prstGeom prst="rect">
+            <a:avLst/>
+          </a:prstGeom>
+        </p:spPr>
+      </p:pic>
+      <p:cxnSp>
+        <p:nvCxnSpPr>
+          <p:cNvPr id="8" name="직선 연결선 7">
+            <a:extLst>
+              <a:ext uri="{FF2B5EF4-FFF2-40B4-BE49-F238E27FC236}">
+                <a16:creationId xmlns:a16="http://schemas.microsoft.com/office/drawing/2014/main" id="{B7D42B28-A7DC-456A-BF07-1C18C3AE1EF2}"/>
+              </a:ext>
+            </a:extLst>
+          </p:cNvPr>
+          <p:cNvCxnSpPr>
+            <a:cxnSpLocks/>
+          </p:cNvCxnSpPr>
+          <p:nvPr/>
+        </p:nvCxnSpPr>
+        <p:spPr>
+          <a:xfrm>
+            <a:off x="0" y="654341"/>
+            <a:ext cx="12192000" cy="0"/>
+          </a:xfrm>
+          <a:prstGeom prst="line">
+            <a:avLst/>
+          </a:prstGeom>
+          <a:ln>
+            <a:solidFill>
+              <a:schemeClr val="bg2">
+                <a:lumMod val="75000"/>
+              </a:schemeClr>
+            </a:solidFill>
+          </a:ln>
+        </p:spPr>
+        <p:style>
+          <a:lnRef idx="1">
+            <a:schemeClr val="accent1"/>
+          </a:lnRef>
+          <a:fillRef idx="0">
+            <a:schemeClr val="accent1"/>
+          </a:fillRef>
+          <a:effectRef idx="0">
+            <a:schemeClr val="accent1"/>
+          </a:effectRef>
+          <a:fontRef idx="minor">
+            <a:schemeClr val="tx1"/>
+          </a:fontRef>
+        </p:style>
+      </p:cxnSp>
+      <p:sp>
+        <p:nvSpPr>
+          <p:cNvPr id="17" name="직사각형 16">
+            <a:extLst>
+              <a:ext uri="{FF2B5EF4-FFF2-40B4-BE49-F238E27FC236}">
+                <a16:creationId xmlns:a16="http://schemas.microsoft.com/office/drawing/2014/main" id="{837371CB-11FE-4357-8A78-0942D3AC4D4A}"/>
+              </a:ext>
+            </a:extLst>
+          </p:cNvPr>
+          <p:cNvSpPr/>
+          <p:nvPr/>
+        </p:nvSpPr>
+        <p:spPr>
+          <a:xfrm>
+            <a:off x="2214693" y="111693"/>
+            <a:ext cx="956346" cy="399777"/>
+          </a:xfrm>
+          <a:prstGeom prst="rect">
+            <a:avLst/>
+          </a:prstGeom>
+          <a:solidFill>
+            <a:srgbClr val="F5F5DC"/>
+          </a:solidFill>
+          <a:ln>
+            <a:noFill/>
+          </a:ln>
+        </p:spPr>
+        <p:style>
+          <a:lnRef idx="2">
+            <a:schemeClr val="accent1">
+              <a:shade val="50000"/>
+            </a:schemeClr>
+          </a:lnRef>
+          <a:fillRef idx="1">
+            <a:schemeClr val="accent1"/>
+          </a:fillRef>
+          <a:effectRef idx="0">
+            <a:schemeClr val="accent1"/>
+          </a:effectRef>
+          <a:fontRef idx="minor">
+            <a:schemeClr val="lt1"/>
+          </a:fontRef>
+        </p:style>
+        <p:txBody>
+          <a:bodyPr rtlCol="0" anchor="ctr"/>
+          <a:lstStyle/>
+          <a:p>
+            <a:pPr algn="ctr"/>
+            <a:r>
+              <a:rPr lang="ko-KR" altLang="en-US" b="1" dirty="0">
+                <a:solidFill>
+                  <a:schemeClr val="tx1"/>
+                </a:solidFill>
+                <a:effectLst/>
+              </a:rPr>
+              <a:t>순한 맛</a:t>
+            </a:r>
+          </a:p>
+        </p:txBody>
+      </p:sp>
+      <p:sp>
+        <p:nvSpPr>
+          <p:cNvPr id="18" name="직사각형 17">
+            <a:extLst>
+              <a:ext uri="{FF2B5EF4-FFF2-40B4-BE49-F238E27FC236}">
+                <a16:creationId xmlns:a16="http://schemas.microsoft.com/office/drawing/2014/main" id="{4FF86DB6-F649-4801-A6A8-760D7D937FA3}"/>
+              </a:ext>
+            </a:extLst>
+          </p:cNvPr>
+          <p:cNvSpPr/>
+          <p:nvPr/>
+        </p:nvSpPr>
+        <p:spPr>
+          <a:xfrm>
+            <a:off x="3171039" y="111693"/>
+            <a:ext cx="1208014" cy="399777"/>
+          </a:xfrm>
+          <a:prstGeom prst="rect">
+            <a:avLst/>
+          </a:prstGeom>
+          <a:solidFill>
+            <a:srgbClr val="F5F5DC"/>
+          </a:solidFill>
+          <a:ln>
+            <a:noFill/>
+          </a:ln>
+        </p:spPr>
+        <p:style>
+          <a:lnRef idx="2">
+            <a:schemeClr val="accent1">
+              <a:shade val="50000"/>
+            </a:schemeClr>
+          </a:lnRef>
+          <a:fillRef idx="1">
+            <a:schemeClr val="accent1"/>
+          </a:fillRef>
+          <a:effectRef idx="0">
+            <a:schemeClr val="accent1"/>
+          </a:effectRef>
+          <a:fontRef idx="minor">
+            <a:schemeClr val="lt1"/>
+          </a:fontRef>
+        </p:style>
+        <p:txBody>
+          <a:bodyPr rtlCol="0" anchor="ctr"/>
+          <a:lstStyle/>
+          <a:p>
+            <a:pPr algn="ctr"/>
+            <a:r>
+              <a:rPr lang="ko-KR" altLang="en-US" b="1" dirty="0">
+                <a:solidFill>
+                  <a:schemeClr val="tx1"/>
+                </a:solidFill>
+              </a:rPr>
+              <a:t>매콤한 맛</a:t>
+            </a:r>
+          </a:p>
+        </p:txBody>
+      </p:sp>
+      <p:sp>
+        <p:nvSpPr>
+          <p:cNvPr id="19" name="직사각형 18">
+            <a:extLst>
+              <a:ext uri="{FF2B5EF4-FFF2-40B4-BE49-F238E27FC236}">
+                <a16:creationId xmlns:a16="http://schemas.microsoft.com/office/drawing/2014/main" id="{987A205C-8FDD-4B55-B587-E67E55AAE049}"/>
+              </a:ext>
+            </a:extLst>
+          </p:cNvPr>
+          <p:cNvSpPr/>
+          <p:nvPr/>
+        </p:nvSpPr>
+        <p:spPr>
+          <a:xfrm>
+            <a:off x="4379053" y="111693"/>
+            <a:ext cx="956346" cy="399777"/>
+          </a:xfrm>
+          <a:prstGeom prst="rect">
+            <a:avLst/>
+          </a:prstGeom>
+          <a:solidFill>
+            <a:srgbClr val="F5F5DC"/>
+          </a:solidFill>
+          <a:ln>
+            <a:noFill/>
+          </a:ln>
+        </p:spPr>
+        <p:style>
+          <a:lnRef idx="2">
+            <a:schemeClr val="accent1">
+              <a:shade val="50000"/>
+            </a:schemeClr>
+          </a:lnRef>
+          <a:fillRef idx="1">
+            <a:schemeClr val="accent1"/>
+          </a:fillRef>
+          <a:effectRef idx="0">
+            <a:schemeClr val="accent1"/>
+          </a:effectRef>
+          <a:fontRef idx="minor">
+            <a:schemeClr val="lt1"/>
+          </a:fontRef>
+        </p:style>
+        <p:txBody>
+          <a:bodyPr rtlCol="0" anchor="ctr"/>
+          <a:lstStyle/>
+          <a:p>
+            <a:pPr algn="ctr"/>
+            <a:r>
+              <a:rPr lang="ko-KR" altLang="en-US" b="1" dirty="0">
+                <a:solidFill>
+                  <a:schemeClr val="tx1"/>
+                </a:solidFill>
+              </a:rPr>
+              <a:t>매운 맛</a:t>
+            </a:r>
+          </a:p>
+        </p:txBody>
+      </p:sp>
+      <p:sp>
+        <p:nvSpPr>
+          <p:cNvPr id="20" name="직사각형 19">
+            <a:extLst>
+              <a:ext uri="{FF2B5EF4-FFF2-40B4-BE49-F238E27FC236}">
+                <a16:creationId xmlns:a16="http://schemas.microsoft.com/office/drawing/2014/main" id="{31876C23-B946-4EC6-A69D-4E4DBD3C63A2}"/>
+              </a:ext>
+            </a:extLst>
+          </p:cNvPr>
+          <p:cNvSpPr/>
+          <p:nvPr/>
+        </p:nvSpPr>
+        <p:spPr>
+          <a:xfrm>
+            <a:off x="5335399" y="111693"/>
+            <a:ext cx="760601" cy="399777"/>
+          </a:xfrm>
+          <a:prstGeom prst="rect">
+            <a:avLst/>
+          </a:prstGeom>
+          <a:solidFill>
+            <a:srgbClr val="F5F5DC"/>
+          </a:solidFill>
+          <a:ln>
+            <a:noFill/>
+          </a:ln>
+        </p:spPr>
+        <p:style>
+          <a:lnRef idx="2">
+            <a:schemeClr val="accent1">
+              <a:shade val="50000"/>
+            </a:schemeClr>
+          </a:lnRef>
+          <a:fillRef idx="1">
+            <a:schemeClr val="accent1"/>
+          </a:fillRef>
+          <a:effectRef idx="0">
+            <a:schemeClr val="accent1"/>
+          </a:effectRef>
+          <a:fontRef idx="minor">
+            <a:schemeClr val="lt1"/>
+          </a:fontRef>
+        </p:style>
+        <p:txBody>
+          <a:bodyPr rtlCol="0" anchor="ctr"/>
+          <a:lstStyle/>
+          <a:p>
+            <a:pPr algn="ctr"/>
+            <a:r>
+              <a:rPr lang="ko-KR" altLang="en-US" b="1" dirty="0">
+                <a:solidFill>
+                  <a:schemeClr val="tx1"/>
+                </a:solidFill>
+              </a:rPr>
+              <a:t>모두</a:t>
+            </a:r>
+          </a:p>
+        </p:txBody>
+      </p:sp>
+      <p:sp>
+        <p:nvSpPr>
+          <p:cNvPr id="30" name="직사각형 29">
+            <a:extLst>
+              <a:ext uri="{FF2B5EF4-FFF2-40B4-BE49-F238E27FC236}">
+                <a16:creationId xmlns:a16="http://schemas.microsoft.com/office/drawing/2014/main" id="{72B70C3C-F415-4E06-BAC5-03ED2B615D2D}"/>
+              </a:ext>
+            </a:extLst>
+          </p:cNvPr>
+          <p:cNvSpPr/>
+          <p:nvPr/>
+        </p:nvSpPr>
+        <p:spPr>
+          <a:xfrm>
+            <a:off x="10686522" y="111693"/>
+            <a:ext cx="1012271" cy="399777"/>
+          </a:xfrm>
+          <a:prstGeom prst="rect">
+            <a:avLst/>
+          </a:prstGeom>
+          <a:solidFill>
+            <a:srgbClr val="F5F5DC"/>
+          </a:solidFill>
+          <a:ln>
+            <a:solidFill>
+              <a:schemeClr val="bg2">
+                <a:lumMod val="75000"/>
+              </a:schemeClr>
+            </a:solidFill>
+          </a:ln>
+        </p:spPr>
+        <p:style>
+          <a:lnRef idx="2">
+            <a:schemeClr val="accent1">
+              <a:shade val="50000"/>
+            </a:schemeClr>
+          </a:lnRef>
+          <a:fillRef idx="1">
+            <a:schemeClr val="accent1"/>
+          </a:fillRef>
+          <a:effectRef idx="0">
+            <a:schemeClr val="accent1"/>
+          </a:effectRef>
+          <a:fontRef idx="minor">
+            <a:schemeClr val="lt1"/>
+          </a:fontRef>
+        </p:style>
+        <p:txBody>
+          <a:bodyPr rtlCol="0" anchor="ctr"/>
+          <a:lstStyle/>
+          <a:p>
+            <a:pPr algn="ctr"/>
+            <a:r>
+              <a:rPr lang="ko-KR" altLang="en-US" b="1" dirty="0">
+                <a:solidFill>
+                  <a:schemeClr val="tx1"/>
+                </a:solidFill>
+              </a:rPr>
+              <a:t>업로드</a:t>
+            </a:r>
+          </a:p>
+        </p:txBody>
+      </p:sp>
+      <p:sp>
+        <p:nvSpPr>
+          <p:cNvPr id="33" name="직사각형 32">
+            <a:extLst>
+              <a:ext uri="{FF2B5EF4-FFF2-40B4-BE49-F238E27FC236}">
+                <a16:creationId xmlns:a16="http://schemas.microsoft.com/office/drawing/2014/main" id="{BABC38BE-98AF-4CE1-8AE1-66294DA81FE2}"/>
+              </a:ext>
+            </a:extLst>
+          </p:cNvPr>
+          <p:cNvSpPr/>
+          <p:nvPr/>
+        </p:nvSpPr>
+        <p:spPr>
+          <a:xfrm>
+            <a:off x="7052346" y="111693"/>
+            <a:ext cx="1311478" cy="399777"/>
+          </a:xfrm>
+          <a:prstGeom prst="rect">
+            <a:avLst/>
+          </a:prstGeom>
+          <a:solidFill>
+            <a:srgbClr val="F5F5DC"/>
+          </a:solidFill>
+          <a:ln>
+            <a:noFill/>
+          </a:ln>
+        </p:spPr>
+        <p:style>
+          <a:lnRef idx="2">
+            <a:schemeClr val="accent1">
+              <a:shade val="50000"/>
+            </a:schemeClr>
+          </a:lnRef>
+          <a:fillRef idx="1">
+            <a:schemeClr val="accent1"/>
+          </a:fillRef>
+          <a:effectRef idx="0">
+            <a:schemeClr val="accent1"/>
+          </a:effectRef>
+          <a:fontRef idx="minor">
+            <a:schemeClr val="lt1"/>
+          </a:fontRef>
+        </p:style>
+        <p:txBody>
+          <a:bodyPr rtlCol="0" anchor="ctr"/>
+          <a:lstStyle/>
+          <a:p>
+            <a:pPr algn="ctr"/>
+            <a:r>
+              <a:rPr lang="ko-KR" altLang="en-US" b="1" dirty="0">
+                <a:solidFill>
+                  <a:schemeClr val="tx1"/>
+                </a:solidFill>
+                <a:effectLst/>
+              </a:rPr>
+              <a:t>일러스트</a:t>
+            </a:r>
+          </a:p>
+        </p:txBody>
+      </p:sp>
+      <p:sp>
+        <p:nvSpPr>
+          <p:cNvPr id="34" name="직사각형 33">
+            <a:extLst>
+              <a:ext uri="{FF2B5EF4-FFF2-40B4-BE49-F238E27FC236}">
+                <a16:creationId xmlns:a16="http://schemas.microsoft.com/office/drawing/2014/main" id="{2CE966E8-6580-4ADB-B11B-072D6D8282EA}"/>
+              </a:ext>
+            </a:extLst>
+          </p:cNvPr>
+          <p:cNvSpPr/>
+          <p:nvPr/>
+        </p:nvSpPr>
+        <p:spPr>
+          <a:xfrm>
+            <a:off x="8363824" y="111693"/>
+            <a:ext cx="1106475" cy="399777"/>
+          </a:xfrm>
+          <a:prstGeom prst="rect">
+            <a:avLst/>
+          </a:prstGeom>
+          <a:solidFill>
+            <a:srgbClr val="F5F5DC"/>
+          </a:solidFill>
+          <a:ln>
+            <a:noFill/>
+          </a:ln>
+        </p:spPr>
+        <p:style>
+          <a:lnRef idx="2">
+            <a:schemeClr val="accent1">
+              <a:shade val="50000"/>
+            </a:schemeClr>
+          </a:lnRef>
+          <a:fillRef idx="1">
+            <a:schemeClr val="accent1"/>
+          </a:fillRef>
+          <a:effectRef idx="0">
+            <a:schemeClr val="accent1"/>
+          </a:effectRef>
+          <a:fontRef idx="minor">
+            <a:schemeClr val="lt1"/>
+          </a:fontRef>
+        </p:style>
+        <p:txBody>
+          <a:bodyPr rtlCol="0" anchor="ctr"/>
+          <a:lstStyle/>
+          <a:p>
+            <a:pPr algn="ctr"/>
+            <a:r>
+              <a:rPr lang="ko-KR" altLang="en-US" b="1" dirty="0">
+                <a:solidFill>
+                  <a:schemeClr val="tx1"/>
+                </a:solidFill>
+              </a:rPr>
+              <a:t>만화</a:t>
+            </a:r>
+          </a:p>
+        </p:txBody>
+      </p:sp>
+      <p:sp>
+        <p:nvSpPr>
+          <p:cNvPr id="2" name="사각형: 둥근 모서리 1">
+            <a:extLst>
+              <a:ext uri="{FF2B5EF4-FFF2-40B4-BE49-F238E27FC236}">
+                <a16:creationId xmlns:a16="http://schemas.microsoft.com/office/drawing/2014/main" id="{B73A43B1-4A06-4551-B0E5-D6944342127F}"/>
+              </a:ext>
+            </a:extLst>
+          </p:cNvPr>
+          <p:cNvSpPr/>
+          <p:nvPr/>
+        </p:nvSpPr>
+        <p:spPr>
+          <a:xfrm>
+            <a:off x="2107034" y="797213"/>
+            <a:ext cx="7977931" cy="2631781"/>
+          </a:xfrm>
+          <a:prstGeom prst="roundRect">
+            <a:avLst>
+              <a:gd name="adj" fmla="val 505"/>
+            </a:avLst>
+          </a:prstGeom>
+          <a:solidFill>
+            <a:schemeClr val="bg2">
+              <a:lumMod val="75000"/>
+            </a:schemeClr>
+          </a:solidFill>
+          <a:ln>
+            <a:noFill/>
+          </a:ln>
+        </p:spPr>
+        <p:style>
+          <a:lnRef idx="2">
+            <a:schemeClr val="accent1">
+              <a:shade val="50000"/>
+            </a:schemeClr>
+          </a:lnRef>
+          <a:fillRef idx="1">
+            <a:schemeClr val="accent1"/>
+          </a:fillRef>
+          <a:effectRef idx="0">
+            <a:schemeClr val="accent1"/>
+          </a:effectRef>
+          <a:fontRef idx="minor">
+            <a:schemeClr val="lt1"/>
+          </a:fontRef>
+        </p:style>
+        <p:txBody>
+          <a:bodyPr rtlCol="0" anchor="ctr"/>
+          <a:lstStyle/>
+          <a:p>
+            <a:pPr algn="ctr"/>
+            <a:endParaRPr lang="ko-KR" altLang="en-US"/>
+          </a:p>
+        </p:txBody>
+      </p:sp>
+      <p:sp>
+        <p:nvSpPr>
+          <p:cNvPr id="31" name="TextBox 30">
+            <a:extLst>
+              <a:ext uri="{FF2B5EF4-FFF2-40B4-BE49-F238E27FC236}">
+                <a16:creationId xmlns:a16="http://schemas.microsoft.com/office/drawing/2014/main" id="{AE0461C4-3E3D-4B3F-B822-7B5144806C79}"/>
+              </a:ext>
+            </a:extLst>
+          </p:cNvPr>
+          <p:cNvSpPr txBox="1"/>
+          <p:nvPr/>
+        </p:nvSpPr>
+        <p:spPr>
+          <a:xfrm>
+            <a:off x="4096092" y="1140639"/>
+            <a:ext cx="3999813" cy="1077218"/>
+          </a:xfrm>
+          <a:prstGeom prst="rect">
+            <a:avLst/>
+          </a:prstGeom>
+          <a:noFill/>
+        </p:spPr>
+        <p:txBody>
+          <a:bodyPr wrap="none" rtlCol="0">
+            <a:spAutoFit/>
+          </a:bodyPr>
+          <a:lstStyle/>
+          <a:p>
+            <a:pPr algn="ctr"/>
+            <a:r>
+              <a:rPr lang="en-US" altLang="ko-KR" sz="3200" b="1" dirty="0"/>
+              <a:t>Welcome to the</a:t>
+            </a:r>
+          </a:p>
+          <a:p>
+            <a:pPr algn="ctr"/>
+            <a:r>
+              <a:rPr lang="en-US" altLang="ko-KR" sz="3200" b="1" dirty="0"/>
+              <a:t>Hyper Image Cloud</a:t>
+            </a:r>
+            <a:endParaRPr lang="ko-KR" altLang="en-US" sz="3200" b="1" dirty="0"/>
+          </a:p>
+        </p:txBody>
+      </p:sp>
+      <p:sp>
+        <p:nvSpPr>
+          <p:cNvPr id="35" name="사각형: 둥근 모서리 34">
+            <a:extLst>
+              <a:ext uri="{FF2B5EF4-FFF2-40B4-BE49-F238E27FC236}">
+                <a16:creationId xmlns:a16="http://schemas.microsoft.com/office/drawing/2014/main" id="{01C8C0A6-4499-4983-9134-5D681C74B6D3}"/>
+              </a:ext>
+            </a:extLst>
+          </p:cNvPr>
+          <p:cNvSpPr/>
+          <p:nvPr/>
+        </p:nvSpPr>
+        <p:spPr>
+          <a:xfrm>
+            <a:off x="3566717" y="3680871"/>
+            <a:ext cx="1883849" cy="662461"/>
+          </a:xfrm>
+          <a:prstGeom prst="roundRect">
+            <a:avLst>
+              <a:gd name="adj" fmla="val 13168"/>
+            </a:avLst>
+          </a:prstGeom>
+          <a:solidFill>
+            <a:schemeClr val="bg2"/>
+          </a:solidFill>
+          <a:ln>
+            <a:noFill/>
+          </a:ln>
+        </p:spPr>
+        <p:style>
+          <a:lnRef idx="2">
+            <a:schemeClr val="accent1">
+              <a:shade val="50000"/>
+            </a:schemeClr>
+          </a:lnRef>
+          <a:fillRef idx="1">
+            <a:schemeClr val="accent1"/>
+          </a:fillRef>
+          <a:effectRef idx="0">
+            <a:schemeClr val="accent1"/>
+          </a:effectRef>
+          <a:fontRef idx="minor">
+            <a:schemeClr val="lt1"/>
+          </a:fontRef>
+        </p:style>
+        <p:txBody>
+          <a:bodyPr rtlCol="0" anchor="ctr"/>
+          <a:lstStyle/>
+          <a:p>
+            <a:pPr algn="ctr"/>
+            <a:endParaRPr lang="ko-KR" altLang="en-US"/>
+          </a:p>
+        </p:txBody>
+      </p:sp>
+      <p:sp>
+        <p:nvSpPr>
+          <p:cNvPr id="37" name="TextBox 36">
+            <a:extLst>
+              <a:ext uri="{FF2B5EF4-FFF2-40B4-BE49-F238E27FC236}">
+                <a16:creationId xmlns:a16="http://schemas.microsoft.com/office/drawing/2014/main" id="{D7F7FBE8-1B70-401B-9128-105632F680DB}"/>
+              </a:ext>
+            </a:extLst>
+          </p:cNvPr>
+          <p:cNvSpPr txBox="1"/>
+          <p:nvPr/>
+        </p:nvSpPr>
+        <p:spPr>
+          <a:xfrm>
+            <a:off x="3566718" y="3842824"/>
+            <a:ext cx="1883849" cy="338554"/>
+          </a:xfrm>
+          <a:prstGeom prst="rect">
+            <a:avLst/>
+          </a:prstGeom>
+          <a:noFill/>
+        </p:spPr>
+        <p:txBody>
+          <a:bodyPr wrap="none" rtlCol="0">
+            <a:spAutoFit/>
+          </a:bodyPr>
+          <a:lstStyle/>
+          <a:p>
+            <a:r>
+              <a:rPr lang="ko-KR" altLang="en-US" sz="1600" b="1" dirty="0">
+                <a:solidFill>
+                  <a:schemeClr val="bg2">
+                    <a:lumMod val="50000"/>
+                  </a:schemeClr>
+                </a:solidFill>
+              </a:rPr>
+              <a:t>총 이미지 수 </a:t>
+            </a:r>
+            <a:r>
+              <a:rPr lang="en-US" altLang="ko-KR" sz="1600" b="1" dirty="0">
+                <a:solidFill>
+                  <a:schemeClr val="bg2">
+                    <a:lumMod val="50000"/>
+                  </a:schemeClr>
+                </a:solidFill>
+              </a:rPr>
+              <a:t>: n</a:t>
+            </a:r>
+            <a:r>
+              <a:rPr lang="ko-KR" altLang="en-US" sz="1600" b="1" dirty="0">
+                <a:solidFill>
+                  <a:schemeClr val="bg2">
+                    <a:lumMod val="50000"/>
+                  </a:schemeClr>
+                </a:solidFill>
+              </a:rPr>
+              <a:t>개</a:t>
+            </a:r>
+          </a:p>
+        </p:txBody>
+      </p:sp>
+      <p:sp>
+        <p:nvSpPr>
+          <p:cNvPr id="42" name="사각형: 둥근 모서리 41">
+            <a:extLst>
+              <a:ext uri="{FF2B5EF4-FFF2-40B4-BE49-F238E27FC236}">
+                <a16:creationId xmlns:a16="http://schemas.microsoft.com/office/drawing/2014/main" id="{97D1B3FB-C7AE-4524-AABA-4C640590D52A}"/>
+              </a:ext>
+            </a:extLst>
+          </p:cNvPr>
+          <p:cNvSpPr/>
+          <p:nvPr/>
+        </p:nvSpPr>
+        <p:spPr>
+          <a:xfrm>
+            <a:off x="6741435" y="3669370"/>
+            <a:ext cx="1883849" cy="662461"/>
+          </a:xfrm>
+          <a:prstGeom prst="roundRect">
+            <a:avLst>
+              <a:gd name="adj" fmla="val 13168"/>
+            </a:avLst>
+          </a:prstGeom>
+          <a:solidFill>
+            <a:schemeClr val="bg2"/>
+          </a:solidFill>
+          <a:ln>
+            <a:noFill/>
+          </a:ln>
+        </p:spPr>
+        <p:style>
+          <a:lnRef idx="2">
+            <a:schemeClr val="accent1">
+              <a:shade val="50000"/>
+            </a:schemeClr>
+          </a:lnRef>
+          <a:fillRef idx="1">
+            <a:schemeClr val="accent1"/>
+          </a:fillRef>
+          <a:effectRef idx="0">
+            <a:schemeClr val="accent1"/>
+          </a:effectRef>
+          <a:fontRef idx="minor">
+            <a:schemeClr val="lt1"/>
+          </a:fontRef>
+        </p:style>
+        <p:txBody>
+          <a:bodyPr rtlCol="0" anchor="ctr"/>
+          <a:lstStyle/>
+          <a:p>
+            <a:pPr algn="ctr"/>
+            <a:endParaRPr lang="ko-KR" altLang="en-US"/>
+          </a:p>
+        </p:txBody>
+      </p:sp>
+      <p:sp>
+        <p:nvSpPr>
+          <p:cNvPr id="43" name="TextBox 42">
+            <a:extLst>
+              <a:ext uri="{FF2B5EF4-FFF2-40B4-BE49-F238E27FC236}">
+                <a16:creationId xmlns:a16="http://schemas.microsoft.com/office/drawing/2014/main" id="{305DEF7C-FF9F-4149-939C-C80AA1198C15}"/>
+              </a:ext>
+            </a:extLst>
+          </p:cNvPr>
+          <p:cNvSpPr txBox="1"/>
+          <p:nvPr/>
+        </p:nvSpPr>
+        <p:spPr>
+          <a:xfrm>
+            <a:off x="6741436" y="3831323"/>
+            <a:ext cx="1861407" cy="338554"/>
+          </a:xfrm>
+          <a:prstGeom prst="rect">
+            <a:avLst/>
+          </a:prstGeom>
+          <a:noFill/>
+        </p:spPr>
+        <p:txBody>
+          <a:bodyPr wrap="none" rtlCol="0">
+            <a:spAutoFit/>
+          </a:bodyPr>
+          <a:lstStyle/>
+          <a:p>
+            <a:r>
+              <a:rPr lang="ko-KR" altLang="en-US" sz="1600" b="1" dirty="0">
+                <a:solidFill>
+                  <a:schemeClr val="bg2">
+                    <a:lumMod val="50000"/>
+                  </a:schemeClr>
+                </a:solidFill>
+              </a:rPr>
+              <a:t>총 용량 </a:t>
+            </a:r>
+            <a:r>
+              <a:rPr lang="en-US" altLang="ko-KR" sz="1600" b="1" dirty="0">
+                <a:solidFill>
+                  <a:schemeClr val="bg2">
+                    <a:lumMod val="50000"/>
+                  </a:schemeClr>
+                </a:solidFill>
+              </a:rPr>
+              <a:t>: </a:t>
+            </a:r>
+            <a:r>
+              <a:rPr lang="en-US" altLang="ko-KR" sz="1600" b="1" dirty="0" err="1">
+                <a:solidFill>
+                  <a:schemeClr val="bg2">
+                    <a:lumMod val="50000"/>
+                  </a:schemeClr>
+                </a:solidFill>
+              </a:rPr>
+              <a:t>NaN</a:t>
+            </a:r>
+            <a:r>
+              <a:rPr lang="en-US" altLang="ko-KR" sz="1600" b="1" dirty="0">
+                <a:solidFill>
+                  <a:schemeClr val="bg2">
+                    <a:lumMod val="50000"/>
+                  </a:schemeClr>
+                </a:solidFill>
+              </a:rPr>
+              <a:t> GB</a:t>
+            </a:r>
+            <a:endParaRPr lang="ko-KR" altLang="en-US" sz="1600" b="1" dirty="0">
+              <a:solidFill>
+                <a:schemeClr val="bg2">
+                  <a:lumMod val="50000"/>
+                </a:schemeClr>
+              </a:solidFill>
+            </a:endParaRPr>
+          </a:p>
+        </p:txBody>
+      </p:sp>
+      <p:sp>
+        <p:nvSpPr>
+          <p:cNvPr id="44" name="TextBox 43">
+            <a:extLst>
+              <a:ext uri="{FF2B5EF4-FFF2-40B4-BE49-F238E27FC236}">
+                <a16:creationId xmlns:a16="http://schemas.microsoft.com/office/drawing/2014/main" id="{44DB7F2A-40DE-4F89-A696-5946B6B93159}"/>
+              </a:ext>
+            </a:extLst>
+          </p:cNvPr>
+          <p:cNvSpPr txBox="1"/>
+          <p:nvPr/>
+        </p:nvSpPr>
+        <p:spPr>
+          <a:xfrm>
+            <a:off x="3848491" y="2458233"/>
+            <a:ext cx="4495013" cy="461665"/>
+          </a:xfrm>
+          <a:prstGeom prst="rect">
+            <a:avLst/>
+          </a:prstGeom>
+          <a:noFill/>
+        </p:spPr>
+        <p:txBody>
+          <a:bodyPr wrap="none" rtlCol="0">
+            <a:spAutoFit/>
+          </a:bodyPr>
+          <a:lstStyle/>
+          <a:p>
+            <a:r>
+              <a:rPr lang="en-US" altLang="ko-KR" sz="2400" b="1" dirty="0">
+                <a:solidFill>
+                  <a:schemeClr val="bg2">
+                    <a:lumMod val="50000"/>
+                  </a:schemeClr>
+                </a:solidFill>
+              </a:rPr>
+              <a:t>This is Image-Sorting System</a:t>
+            </a:r>
+            <a:endParaRPr lang="ko-KR" altLang="en-US" sz="2400" b="1" dirty="0">
+              <a:solidFill>
+                <a:schemeClr val="bg2">
+                  <a:lumMod val="50000"/>
+                </a:schemeClr>
+              </a:solidFill>
+            </a:endParaRPr>
+          </a:p>
+        </p:txBody>
+      </p:sp>
+    </p:spTree>
+    <p:extLst>
+      <p:ext uri="{BB962C8B-B14F-4D97-AF65-F5344CB8AC3E}">
+        <p14:creationId xmlns:p14="http://schemas.microsoft.com/office/powerpoint/2010/main" val="3951149804"/>
+      </p:ext>
+    </p:extLst>
+  </p:cSld>
+  <p:clrMapOvr>
+    <a:masterClrMapping/>
+  </p:clrMapOvr>
+</p:sld>
+</file>
+
+<file path=ppt/slides/slide5.xml><?xml version="1.0" encoding="utf-8"?>
+<p:sld xmlns:a="http://schemas.openxmlformats.org/drawingml/2006/main" xmlns:r="http://schemas.openxmlformats.org/officeDocument/2006/relationships" xmlns:p="http://schemas.openxmlformats.org/presentationml/2006/main">
+  <p:cSld>
+    <p:spTree>
+      <p:nvGrpSpPr>
+        <p:cNvPr id="1" name=""/>
+        <p:cNvGrpSpPr/>
+        <p:nvPr/>
+      </p:nvGrpSpPr>
+      <p:grpSpPr>
+        <a:xfrm>
+          <a:off x="0" y="0"/>
+          <a:ext cx="0" cy="0"/>
+          <a:chOff x="0" y="0"/>
+          <a:chExt cx="0" cy="0"/>
+        </a:xfrm>
+      </p:grpSpPr>
+      <p:sp>
+        <p:nvSpPr>
+          <p:cNvPr id="4" name="직사각형 3">
+            <a:extLst>
+              <a:ext uri="{FF2B5EF4-FFF2-40B4-BE49-F238E27FC236}">
+                <a16:creationId xmlns:a16="http://schemas.microsoft.com/office/drawing/2014/main" id="{2C8729BE-AB31-4E9B-A2B8-913EBA6DDACB}"/>
+              </a:ext>
+            </a:extLst>
+          </p:cNvPr>
+          <p:cNvSpPr/>
+          <p:nvPr/>
+        </p:nvSpPr>
+        <p:spPr>
+          <a:xfrm>
+            <a:off x="0" y="0"/>
+            <a:ext cx="12192000" cy="6858000"/>
+          </a:xfrm>
+          <a:prstGeom prst="rect">
+            <a:avLst/>
+          </a:prstGeom>
+          <a:solidFill>
+            <a:srgbClr val="F5F5DC"/>
+          </a:solidFill>
+          <a:ln>
+            <a:noFill/>
+          </a:ln>
+        </p:spPr>
+        <p:style>
+          <a:lnRef idx="2">
+            <a:schemeClr val="accent1">
+              <a:shade val="50000"/>
+            </a:schemeClr>
+          </a:lnRef>
+          <a:fillRef idx="1">
+            <a:schemeClr val="accent1"/>
+          </a:fillRef>
+          <a:effectRef idx="0">
+            <a:schemeClr val="accent1"/>
+          </a:effectRef>
+          <a:fontRef idx="minor">
+            <a:schemeClr val="lt1"/>
+          </a:fontRef>
+        </p:style>
+        <p:txBody>
+          <a:bodyPr rtlCol="0" anchor="ctr"/>
+          <a:lstStyle/>
+          <a:p>
+            <a:pPr algn="ctr"/>
+            <a:endParaRPr lang="ko-KR" altLang="en-US" dirty="0"/>
+          </a:p>
+        </p:txBody>
+      </p:sp>
+      <p:sp>
+        <p:nvSpPr>
+          <p:cNvPr id="5" name="사각형: 둥근 모서리 4">
+            <a:extLst>
+              <a:ext uri="{FF2B5EF4-FFF2-40B4-BE49-F238E27FC236}">
+                <a16:creationId xmlns:a16="http://schemas.microsoft.com/office/drawing/2014/main" id="{2CA6D02E-513D-4164-A56F-E6B4448A24DC}"/>
+              </a:ext>
+            </a:extLst>
+          </p:cNvPr>
+          <p:cNvSpPr/>
+          <p:nvPr/>
+        </p:nvSpPr>
+        <p:spPr>
+          <a:xfrm>
+            <a:off x="161488" y="132125"/>
+            <a:ext cx="11869024" cy="6593747"/>
+          </a:xfrm>
+          <a:prstGeom prst="roundRect">
+            <a:avLst>
+              <a:gd name="adj" fmla="val 2246"/>
+            </a:avLst>
+          </a:prstGeom>
+          <a:solidFill>
+            <a:srgbClr val="F5F5DC"/>
+          </a:solidFill>
+          <a:ln>
+            <a:solidFill>
+              <a:schemeClr val="bg2">
+                <a:lumMod val="75000"/>
+              </a:schemeClr>
+            </a:solidFill>
+          </a:ln>
+        </p:spPr>
+        <p:style>
+          <a:lnRef idx="2">
+            <a:schemeClr val="accent1">
+              <a:shade val="50000"/>
+            </a:schemeClr>
+          </a:lnRef>
+          <a:fillRef idx="1">
+            <a:schemeClr val="accent1"/>
+          </a:fillRef>
+          <a:effectRef idx="0">
+            <a:schemeClr val="accent1"/>
+          </a:effectRef>
+          <a:fontRef idx="minor">
+            <a:schemeClr val="lt1"/>
+          </a:fontRef>
+        </p:style>
+        <p:txBody>
+          <a:bodyPr rtlCol="0" anchor="ctr"/>
+          <a:lstStyle/>
+          <a:p>
+            <a:pPr algn="ctr"/>
+            <a:endParaRPr lang="ko-KR" altLang="en-US"/>
+          </a:p>
+        </p:txBody>
+      </p:sp>
+      <p:sp>
+        <p:nvSpPr>
+          <p:cNvPr id="7" name="사각형: 둥근 모서리 6">
+            <a:extLst>
+              <a:ext uri="{FF2B5EF4-FFF2-40B4-BE49-F238E27FC236}">
+                <a16:creationId xmlns:a16="http://schemas.microsoft.com/office/drawing/2014/main" id="{7770C2C1-0F77-4E83-9C6F-ADC12A91EE61}"/>
+              </a:ext>
+            </a:extLst>
+          </p:cNvPr>
+          <p:cNvSpPr/>
+          <p:nvPr/>
+        </p:nvSpPr>
+        <p:spPr>
+          <a:xfrm>
+            <a:off x="457199" y="394282"/>
+            <a:ext cx="2386669" cy="6069435"/>
+          </a:xfrm>
+          <a:prstGeom prst="roundRect">
+            <a:avLst>
+              <a:gd name="adj" fmla="val 3717"/>
+            </a:avLst>
+          </a:prstGeom>
+          <a:solidFill>
+            <a:srgbClr val="F5F5DC"/>
+          </a:solidFill>
+          <a:ln>
+            <a:solidFill>
+              <a:schemeClr val="bg2">
+                <a:lumMod val="75000"/>
+              </a:schemeClr>
+            </a:solidFill>
+          </a:ln>
+        </p:spPr>
+        <p:style>
+          <a:lnRef idx="2">
+            <a:schemeClr val="accent1">
+              <a:shade val="50000"/>
+            </a:schemeClr>
+          </a:lnRef>
+          <a:fillRef idx="1">
+            <a:schemeClr val="accent1"/>
+          </a:fillRef>
+          <a:effectRef idx="0">
+            <a:schemeClr val="accent1"/>
+          </a:effectRef>
+          <a:fontRef idx="minor">
+            <a:schemeClr val="lt1"/>
+          </a:fontRef>
+        </p:style>
+        <p:txBody>
+          <a:bodyPr rtlCol="0" anchor="ctr"/>
+          <a:lstStyle/>
+          <a:p>
+            <a:pPr algn="ctr"/>
+            <a:endParaRPr lang="ko-KR" altLang="en-US"/>
+          </a:p>
+        </p:txBody>
+      </p:sp>
+      <p:sp>
+        <p:nvSpPr>
+          <p:cNvPr id="9" name="직사각형 8">
+            <a:extLst>
+              <a:ext uri="{FF2B5EF4-FFF2-40B4-BE49-F238E27FC236}">
+                <a16:creationId xmlns:a16="http://schemas.microsoft.com/office/drawing/2014/main" id="{B42D4978-E613-4F58-865B-E5E139EBC306}"/>
+              </a:ext>
+            </a:extLst>
+          </p:cNvPr>
+          <p:cNvSpPr/>
+          <p:nvPr/>
+        </p:nvSpPr>
+        <p:spPr>
+          <a:xfrm>
+            <a:off x="755009" y="1258347"/>
+            <a:ext cx="1789433" cy="4079147"/>
+          </a:xfrm>
+          <a:prstGeom prst="rect">
+            <a:avLst/>
+          </a:prstGeom>
+          <a:solidFill>
+            <a:srgbClr val="F5F5DC"/>
+          </a:solidFill>
+          <a:ln>
+            <a:solidFill>
+              <a:schemeClr val="bg2">
+                <a:lumMod val="75000"/>
+              </a:schemeClr>
+            </a:solidFill>
+          </a:ln>
+        </p:spPr>
+        <p:style>
+          <a:lnRef idx="2">
+            <a:schemeClr val="accent1">
+              <a:shade val="50000"/>
+            </a:schemeClr>
+          </a:lnRef>
+          <a:fillRef idx="1">
+            <a:schemeClr val="accent1"/>
+          </a:fillRef>
+          <a:effectRef idx="0">
+            <a:schemeClr val="accent1"/>
+          </a:effectRef>
+          <a:fontRef idx="minor">
+            <a:schemeClr val="lt1"/>
+          </a:fontRef>
+        </p:style>
+        <p:txBody>
+          <a:bodyPr rtlCol="0" anchor="ctr"/>
+          <a:lstStyle/>
+          <a:p>
+            <a:pPr algn="ctr"/>
+            <a:endParaRPr lang="ko-KR" altLang="en-US" dirty="0"/>
+          </a:p>
+        </p:txBody>
+      </p:sp>
+      <p:sp>
+        <p:nvSpPr>
+          <p:cNvPr id="11" name="직사각형 10">
+            <a:extLst>
+              <a:ext uri="{FF2B5EF4-FFF2-40B4-BE49-F238E27FC236}">
+                <a16:creationId xmlns:a16="http://schemas.microsoft.com/office/drawing/2014/main" id="{2A303B22-0EBC-41EB-825D-2953C466F2B9}"/>
+              </a:ext>
+            </a:extLst>
+          </p:cNvPr>
+          <p:cNvSpPr/>
+          <p:nvPr/>
+        </p:nvSpPr>
+        <p:spPr>
+          <a:xfrm>
+            <a:off x="755010" y="872455"/>
+            <a:ext cx="1789432" cy="385893"/>
+          </a:xfrm>
+          <a:prstGeom prst="rect">
+            <a:avLst/>
+          </a:prstGeom>
+          <a:solidFill>
+            <a:srgbClr val="F5F5DC"/>
+          </a:solidFill>
+          <a:ln>
+            <a:solidFill>
+              <a:schemeClr val="bg2">
+                <a:lumMod val="75000"/>
+              </a:schemeClr>
+            </a:solidFill>
+          </a:ln>
+        </p:spPr>
+        <p:style>
+          <a:lnRef idx="2">
+            <a:schemeClr val="accent1">
+              <a:shade val="50000"/>
+            </a:schemeClr>
+          </a:lnRef>
+          <a:fillRef idx="1">
+            <a:schemeClr val="accent1"/>
+          </a:fillRef>
+          <a:effectRef idx="0">
+            <a:schemeClr val="accent1"/>
+          </a:effectRef>
+          <a:fontRef idx="minor">
+            <a:schemeClr val="lt1"/>
+          </a:fontRef>
+        </p:style>
+        <p:txBody>
+          <a:bodyPr rtlCol="0" anchor="ctr"/>
+          <a:lstStyle/>
+          <a:p>
+            <a:r>
+              <a:rPr lang="ko-KR" altLang="en-US" sz="1400" b="1" dirty="0">
+                <a:solidFill>
+                  <a:schemeClr val="tx1"/>
+                </a:solidFill>
+              </a:rPr>
+              <a:t> 작가 </a:t>
+            </a:r>
+            <a:r>
+              <a:rPr lang="en-US" altLang="ko-KR" sz="1400" b="1" dirty="0">
+                <a:solidFill>
+                  <a:schemeClr val="tx1"/>
+                </a:solidFill>
+              </a:rPr>
+              <a:t>(39)</a:t>
+            </a:r>
+            <a:endParaRPr lang="ko-KR" altLang="en-US" sz="1400" b="1" dirty="0">
+              <a:solidFill>
+                <a:schemeClr val="tx1"/>
+              </a:solidFill>
+            </a:endParaRPr>
+          </a:p>
+        </p:txBody>
+      </p:sp>
+      <p:sp>
+        <p:nvSpPr>
+          <p:cNvPr id="12" name="직사각형 11">
+            <a:extLst>
+              <a:ext uri="{FF2B5EF4-FFF2-40B4-BE49-F238E27FC236}">
+                <a16:creationId xmlns:a16="http://schemas.microsoft.com/office/drawing/2014/main" id="{B414BA08-F5FE-4338-AAE8-536AFD2FC650}"/>
+              </a:ext>
+            </a:extLst>
+          </p:cNvPr>
+          <p:cNvSpPr/>
+          <p:nvPr/>
+        </p:nvSpPr>
+        <p:spPr>
+          <a:xfrm>
+            <a:off x="755010" y="5599652"/>
+            <a:ext cx="1789432" cy="385893"/>
+          </a:xfrm>
+          <a:prstGeom prst="rect">
+            <a:avLst/>
+          </a:prstGeom>
+          <a:solidFill>
+            <a:srgbClr val="F5F5DC"/>
+          </a:solidFill>
+          <a:ln>
+            <a:solidFill>
+              <a:schemeClr val="bg2">
+                <a:lumMod val="75000"/>
+              </a:schemeClr>
+            </a:solidFill>
+          </a:ln>
+        </p:spPr>
+        <p:style>
+          <a:lnRef idx="2">
+            <a:schemeClr val="accent1">
+              <a:shade val="50000"/>
+            </a:schemeClr>
+          </a:lnRef>
+          <a:fillRef idx="1">
+            <a:schemeClr val="accent1"/>
+          </a:fillRef>
+          <a:effectRef idx="0">
+            <a:schemeClr val="accent1"/>
+          </a:effectRef>
+          <a:fontRef idx="minor">
+            <a:schemeClr val="lt1"/>
+          </a:fontRef>
+        </p:style>
+        <p:txBody>
+          <a:bodyPr rtlCol="0" anchor="ctr"/>
+          <a:lstStyle/>
+          <a:p>
+            <a:r>
+              <a:rPr lang="ko-KR" altLang="en-US" sz="1400" b="1" dirty="0">
+                <a:solidFill>
+                  <a:schemeClr val="tx1"/>
+                </a:solidFill>
+              </a:rPr>
+              <a:t> 캐릭터 </a:t>
+            </a:r>
+            <a:r>
+              <a:rPr lang="en-US" altLang="ko-KR" sz="1400" b="1" dirty="0">
+                <a:solidFill>
+                  <a:schemeClr val="tx1"/>
+                </a:solidFill>
+              </a:rPr>
+              <a:t>(98)</a:t>
+            </a:r>
+            <a:endParaRPr lang="ko-KR" altLang="en-US" sz="1400" b="1" dirty="0">
+              <a:solidFill>
+                <a:schemeClr val="tx1"/>
+              </a:solidFill>
+            </a:endParaRPr>
+          </a:p>
+        </p:txBody>
+      </p:sp>
+      <p:sp>
+        <p:nvSpPr>
+          <p:cNvPr id="13" name="TextBox 12">
+            <a:extLst>
+              <a:ext uri="{FF2B5EF4-FFF2-40B4-BE49-F238E27FC236}">
+                <a16:creationId xmlns:a16="http://schemas.microsoft.com/office/drawing/2014/main" id="{4B6887DF-C7FA-4D98-9B75-CAAD230023A3}"/>
+              </a:ext>
+            </a:extLst>
+          </p:cNvPr>
+          <p:cNvSpPr txBox="1"/>
+          <p:nvPr/>
+        </p:nvSpPr>
+        <p:spPr>
+          <a:xfrm>
+            <a:off x="830511" y="1358933"/>
+            <a:ext cx="1083951" cy="276999"/>
+          </a:xfrm>
+          <a:prstGeom prst="rect">
+            <a:avLst/>
+          </a:prstGeom>
+          <a:noFill/>
+        </p:spPr>
+        <p:txBody>
+          <a:bodyPr wrap="none" rtlCol="0">
+            <a:spAutoFit/>
+          </a:bodyPr>
+          <a:lstStyle/>
+          <a:p>
+            <a:r>
+              <a:rPr lang="en-US" altLang="ko-KR" sz="1200" b="1" dirty="0"/>
+              <a:t>MMM</a:t>
+            </a:r>
+            <a:r>
+              <a:rPr lang="en-US" altLang="ko-KR" sz="1200" dirty="0"/>
+              <a:t> </a:t>
+            </a:r>
+            <a:r>
+              <a:rPr lang="en-US" altLang="ko-KR" sz="1200" b="1" dirty="0"/>
+              <a:t>( 29 )</a:t>
+            </a:r>
+            <a:endParaRPr lang="ko-KR" altLang="en-US" sz="1200" b="1" dirty="0"/>
+          </a:p>
+        </p:txBody>
+      </p:sp>
+      <p:sp>
+        <p:nvSpPr>
+          <p:cNvPr id="14" name="TextBox 13">
+            <a:extLst>
+              <a:ext uri="{FF2B5EF4-FFF2-40B4-BE49-F238E27FC236}">
+                <a16:creationId xmlns:a16="http://schemas.microsoft.com/office/drawing/2014/main" id="{7E76D786-178B-4C70-9D58-205BB2EBDD35}"/>
+              </a:ext>
+            </a:extLst>
+          </p:cNvPr>
+          <p:cNvSpPr txBox="1"/>
+          <p:nvPr/>
+        </p:nvSpPr>
+        <p:spPr>
+          <a:xfrm>
+            <a:off x="830511" y="1783460"/>
+            <a:ext cx="1098378" cy="276999"/>
+          </a:xfrm>
+          <a:prstGeom prst="rect">
+            <a:avLst/>
+          </a:prstGeom>
+          <a:noFill/>
+        </p:spPr>
+        <p:txBody>
+          <a:bodyPr wrap="none" rtlCol="0">
+            <a:spAutoFit/>
+          </a:bodyPr>
+          <a:lstStyle/>
+          <a:p>
+            <a:r>
+              <a:rPr lang="ko-KR" altLang="en-US" sz="1200" b="1" dirty="0" err="1"/>
+              <a:t>하군하</a:t>
+            </a:r>
+            <a:r>
+              <a:rPr lang="en-US" altLang="ko-KR" sz="1200" dirty="0"/>
+              <a:t> </a:t>
+            </a:r>
+            <a:r>
+              <a:rPr lang="en-US" altLang="ko-KR" sz="1200" b="1" dirty="0"/>
+              <a:t>( 18 )</a:t>
+            </a:r>
+            <a:endParaRPr lang="ko-KR" altLang="en-US" sz="1200" b="1" dirty="0"/>
+          </a:p>
+        </p:txBody>
+      </p:sp>
+      <p:sp>
+        <p:nvSpPr>
+          <p:cNvPr id="15" name="TextBox 14">
+            <a:extLst>
+              <a:ext uri="{FF2B5EF4-FFF2-40B4-BE49-F238E27FC236}">
+                <a16:creationId xmlns:a16="http://schemas.microsoft.com/office/drawing/2014/main" id="{10A7C299-FFFC-480B-A744-5D5B316063C7}"/>
+              </a:ext>
+            </a:extLst>
+          </p:cNvPr>
+          <p:cNvSpPr txBox="1"/>
+          <p:nvPr/>
+        </p:nvSpPr>
+        <p:spPr>
+          <a:xfrm>
+            <a:off x="830511" y="2205722"/>
+            <a:ext cx="1713931" cy="276999"/>
+          </a:xfrm>
+          <a:prstGeom prst="rect">
+            <a:avLst/>
+          </a:prstGeom>
+          <a:noFill/>
+        </p:spPr>
+        <p:txBody>
+          <a:bodyPr wrap="none" rtlCol="0">
+            <a:spAutoFit/>
+          </a:bodyPr>
+          <a:lstStyle/>
+          <a:p>
+            <a:r>
+              <a:rPr lang="ko-KR" altLang="en-US" sz="1200" b="1" dirty="0" err="1"/>
+              <a:t>정신병자삐칠이</a:t>
+            </a:r>
+            <a:r>
+              <a:rPr lang="ko-KR" altLang="en-US" sz="1200" b="1" dirty="0"/>
+              <a:t> </a:t>
+            </a:r>
+            <a:r>
+              <a:rPr lang="en-US" altLang="ko-KR" sz="1200" b="1" dirty="0"/>
+              <a:t>( 23 )</a:t>
+            </a:r>
+            <a:endParaRPr lang="ko-KR" altLang="en-US" sz="1200" b="1" dirty="0"/>
+          </a:p>
+        </p:txBody>
+      </p:sp>
+    </p:spTree>
+    <p:extLst>
+      <p:ext uri="{BB962C8B-B14F-4D97-AF65-F5344CB8AC3E}">
+        <p14:creationId xmlns:p14="http://schemas.microsoft.com/office/powerpoint/2010/main" val="274572738"/>
+      </p:ext>
+    </p:extLst>
+  </p:cSld>
+  <p:clrMapOvr>
+    <a:masterClrMapping/>
+  </p:clrMapOvr>
+</p:sld>
+</file>
+
+<file path=ppt/slides/slide6.xml><?xml version="1.0" encoding="utf-8"?>
+<p:sld xmlns:a="http://schemas.openxmlformats.org/drawingml/2006/main" xmlns:r="http://schemas.openxmlformats.org/officeDocument/2006/relationships" xmlns:p="http://schemas.openxmlformats.org/presentationml/2006/main">
+  <p:cSld>
+    <p:spTree>
+      <p:nvGrpSpPr>
+        <p:cNvPr id="1" name=""/>
+        <p:cNvGrpSpPr/>
+        <p:nvPr/>
+      </p:nvGrpSpPr>
+      <p:grpSpPr>
+        <a:xfrm>
+          <a:off x="0" y="0"/>
+          <a:ext cx="0" cy="0"/>
+          <a:chOff x="0" y="0"/>
+          <a:chExt cx="0" cy="0"/>
+        </a:xfrm>
+      </p:grpSpPr>
+      <p:sp>
+        <p:nvSpPr>
           <p:cNvPr id="2" name="제목 1">
             <a:extLst>
               <a:ext uri="{FF2B5EF4-FFF2-40B4-BE49-F238E27FC236}">
@@ -6244,8 +8391,8 @@
         </p:nvSpPr>
         <p:spPr>
           <a:xfrm>
-            <a:off x="180648" y="766296"/>
-            <a:ext cx="1704313" cy="461665"/>
+            <a:off x="281316" y="3770461"/>
+            <a:ext cx="4495013" cy="461665"/>
           </a:xfrm>
           <a:prstGeom prst="rect">
             <a:avLst/>
@@ -6259,12 +8406,8 @@
           <a:lstStyle/>
           <a:p>
             <a:r>
-              <a:rPr lang="ko-KR" altLang="en-US" sz="2400" b="1" dirty="0"/>
-              <a:t>작가 </a:t>
-            </a:r>
-            <a:r>
               <a:rPr lang="en-US" altLang="ko-KR" sz="2400" b="1" dirty="0"/>
-              <a:t>( 39 )</a:t>
+              <a:t>This is Image-Sorting System</a:t>
             </a:r>
             <a:endParaRPr lang="ko-KR" altLang="en-US" sz="2400" b="1" dirty="0"/>
           </a:p>
